--- a/PPTs/Chxx_Review.pptx
+++ b/PPTs/Chxx_Review.pptx
@@ -5,7 +5,7 @@
     <p:sldMasterId id="2147483660" r:id="rId1"/>
   </p:sldMasterIdLst>
   <p:notesMasterIdLst>
-    <p:notesMasterId r:id="rId32"/>
+    <p:notesMasterId r:id="rId22"/>
   </p:notesMasterIdLst>
   <p:sldIdLst>
     <p:sldId id="256" r:id="rId2"/>
@@ -19,25 +19,15 @@
     <p:sldId id="261" r:id="rId10"/>
     <p:sldId id="292" r:id="rId11"/>
     <p:sldId id="293" r:id="rId12"/>
-    <p:sldId id="294" r:id="rId13"/>
-    <p:sldId id="263" r:id="rId14"/>
-    <p:sldId id="295" r:id="rId15"/>
-    <p:sldId id="296" r:id="rId16"/>
-    <p:sldId id="303" r:id="rId17"/>
-    <p:sldId id="304" r:id="rId18"/>
-    <p:sldId id="297" r:id="rId19"/>
-    <p:sldId id="305" r:id="rId20"/>
-    <p:sldId id="306" r:id="rId21"/>
-    <p:sldId id="309" r:id="rId22"/>
-    <p:sldId id="266" r:id="rId23"/>
-    <p:sldId id="298" r:id="rId24"/>
-    <p:sldId id="278" r:id="rId25"/>
-    <p:sldId id="279" r:id="rId26"/>
-    <p:sldId id="300" r:id="rId27"/>
-    <p:sldId id="283" r:id="rId28"/>
-    <p:sldId id="299" r:id="rId29"/>
-    <p:sldId id="281" r:id="rId30"/>
-    <p:sldId id="302" r:id="rId31"/>
+    <p:sldId id="263" r:id="rId13"/>
+    <p:sldId id="295" r:id="rId14"/>
+    <p:sldId id="296" r:id="rId15"/>
+    <p:sldId id="303" r:id="rId16"/>
+    <p:sldId id="297" r:id="rId17"/>
+    <p:sldId id="305" r:id="rId18"/>
+    <p:sldId id="306" r:id="rId19"/>
+    <p:sldId id="300" r:id="rId20"/>
+    <p:sldId id="283" r:id="rId21"/>
   </p:sldIdLst>
   <p:sldSz cx="9144000" cy="6858000" type="screen4x3"/>
   <p:notesSz cx="6858000" cy="9144000"/>
@@ -167,8 +157,8 @@
 <pc:chgInfo xmlns:a="http://schemas.openxmlformats.org/drawingml/2006/main" xmlns:r="http://schemas.openxmlformats.org/officeDocument/2006/relationships" xmlns:ac="http://schemas.microsoft.com/office/drawing/2013/main/command" xmlns:pc="http://schemas.microsoft.com/office/powerpoint/2013/main/command">
   <pc:docChgLst>
     <pc:chgData name="Zonghua Gu" userId="9a7e1853e1951ef5" providerId="LiveId" clId="{CF1FAA12-072C-4ED5-BA76-0FFFAEFDB88A}"/>
-    <pc:docChg chg="undo custSel modSld">
-      <pc:chgData name="Zonghua Gu" userId="9a7e1853e1951ef5" providerId="LiveId" clId="{CF1FAA12-072C-4ED5-BA76-0FFFAEFDB88A}" dt="2025-10-07T13:12:46.888" v="43" actId="20577"/>
+    <pc:docChg chg="undo custSel delSld modSld">
+      <pc:chgData name="Zonghua Gu" userId="9a7e1853e1951ef5" providerId="LiveId" clId="{CF1FAA12-072C-4ED5-BA76-0FFFAEFDB88A}" dt="2025-10-07T21:33:07.535" v="70" actId="47"/>
       <pc:docMkLst>
         <pc:docMk/>
       </pc:docMkLst>
@@ -280,6 +270,114 @@
             <ac:spMk id="3" creationId="{00000000-0000-0000-0000-000000000000}"/>
           </ac:spMkLst>
         </pc:spChg>
+      </pc:sldChg>
+      <pc:sldChg chg="del">
+        <pc:chgData name="Zonghua Gu" userId="9a7e1853e1951ef5" providerId="LiveId" clId="{CF1FAA12-072C-4ED5-BA76-0FFFAEFDB88A}" dt="2025-10-07T21:29:25.464" v="63" actId="47"/>
+        <pc:sldMkLst>
+          <pc:docMk/>
+          <pc:sldMk cId="3901081122" sldId="266"/>
+        </pc:sldMkLst>
+      </pc:sldChg>
+      <pc:sldChg chg="del">
+        <pc:chgData name="Zonghua Gu" userId="9a7e1853e1951ef5" providerId="LiveId" clId="{CF1FAA12-072C-4ED5-BA76-0FFFAEFDB88A}" dt="2025-10-07T21:29:27.318" v="65" actId="47"/>
+        <pc:sldMkLst>
+          <pc:docMk/>
+          <pc:sldMk cId="210484945" sldId="278"/>
+        </pc:sldMkLst>
+      </pc:sldChg>
+      <pc:sldChg chg="del">
+        <pc:chgData name="Zonghua Gu" userId="9a7e1853e1951ef5" providerId="LiveId" clId="{CF1FAA12-072C-4ED5-BA76-0FFFAEFDB88A}" dt="2025-10-07T21:29:28.111" v="66" actId="47"/>
+        <pc:sldMkLst>
+          <pc:docMk/>
+          <pc:sldMk cId="3054749938" sldId="279"/>
+        </pc:sldMkLst>
+      </pc:sldChg>
+      <pc:sldChg chg="del">
+        <pc:chgData name="Zonghua Gu" userId="9a7e1853e1951ef5" providerId="LiveId" clId="{CF1FAA12-072C-4ED5-BA76-0FFFAEFDB88A}" dt="2025-10-07T21:33:06.229" v="69" actId="47"/>
+        <pc:sldMkLst>
+          <pc:docMk/>
+          <pc:sldMk cId="3034693896" sldId="281"/>
+        </pc:sldMkLst>
+      </pc:sldChg>
+      <pc:sldChg chg="modSp mod">
+        <pc:chgData name="Zonghua Gu" userId="9a7e1853e1951ef5" providerId="LiveId" clId="{CF1FAA12-072C-4ED5-BA76-0FFFAEFDB88A}" dt="2025-10-07T21:29:55.259" v="67" actId="947"/>
+        <pc:sldMkLst>
+          <pc:docMk/>
+          <pc:sldMk cId="1623878550" sldId="283"/>
+        </pc:sldMkLst>
+        <pc:spChg chg="mod">
+          <ac:chgData name="Zonghua Gu" userId="9a7e1853e1951ef5" providerId="LiveId" clId="{CF1FAA12-072C-4ED5-BA76-0FFFAEFDB88A}" dt="2025-10-07T21:29:55.259" v="67" actId="947"/>
+          <ac:spMkLst>
+            <pc:docMk/>
+            <pc:sldMk cId="1623878550" sldId="283"/>
+            <ac:spMk id="2" creationId="{00000000-0000-0000-0000-000000000000}"/>
+          </ac:spMkLst>
+        </pc:spChg>
+      </pc:sldChg>
+      <pc:sldChg chg="addSp modSp mod">
+        <pc:chgData name="Zonghua Gu" userId="9a7e1853e1951ef5" providerId="LiveId" clId="{CF1FAA12-072C-4ED5-BA76-0FFFAEFDB88A}" dt="2025-10-07T21:28:17.077" v="59" actId="1076"/>
+        <pc:sldMkLst>
+          <pc:docMk/>
+          <pc:sldMk cId="601431910" sldId="284"/>
+        </pc:sldMkLst>
+        <pc:spChg chg="add mod">
+          <ac:chgData name="Zonghua Gu" userId="9a7e1853e1951ef5" providerId="LiveId" clId="{CF1FAA12-072C-4ED5-BA76-0FFFAEFDB88A}" dt="2025-10-07T21:28:17.077" v="59" actId="1076"/>
+          <ac:spMkLst>
+            <pc:docMk/>
+            <pc:sldMk cId="601431910" sldId="284"/>
+            <ac:spMk id="7" creationId="{91A4DE93-40B1-3CA9-1D41-3281E80C40F8}"/>
+          </ac:spMkLst>
+        </pc:spChg>
+        <pc:graphicFrameChg chg="mod">
+          <ac:chgData name="Zonghua Gu" userId="9a7e1853e1951ef5" providerId="LiveId" clId="{CF1FAA12-072C-4ED5-BA76-0FFFAEFDB88A}" dt="2025-10-07T21:27:41.041" v="46" actId="1076"/>
+          <ac:graphicFrameMkLst>
+            <pc:docMk/>
+            <pc:sldMk cId="601431910" sldId="284"/>
+            <ac:graphicFrameMk id="5" creationId="{00000000-0000-0000-0000-000000000000}"/>
+          </ac:graphicFrameMkLst>
+        </pc:graphicFrameChg>
+      </pc:sldChg>
+      <pc:sldChg chg="del">
+        <pc:chgData name="Zonghua Gu" userId="9a7e1853e1951ef5" providerId="LiveId" clId="{CF1FAA12-072C-4ED5-BA76-0FFFAEFDB88A}" dt="2025-10-07T21:28:49.131" v="60" actId="47"/>
+        <pc:sldMkLst>
+          <pc:docMk/>
+          <pc:sldMk cId="1620139945" sldId="294"/>
+        </pc:sldMkLst>
+      </pc:sldChg>
+      <pc:sldChg chg="del">
+        <pc:chgData name="Zonghua Gu" userId="9a7e1853e1951ef5" providerId="LiveId" clId="{CF1FAA12-072C-4ED5-BA76-0FFFAEFDB88A}" dt="2025-10-07T21:29:26.449" v="64" actId="47"/>
+        <pc:sldMkLst>
+          <pc:docMk/>
+          <pc:sldMk cId="3243208761" sldId="298"/>
+        </pc:sldMkLst>
+      </pc:sldChg>
+      <pc:sldChg chg="del">
+        <pc:chgData name="Zonghua Gu" userId="9a7e1853e1951ef5" providerId="LiveId" clId="{CF1FAA12-072C-4ED5-BA76-0FFFAEFDB88A}" dt="2025-10-07T21:33:05.228" v="68" actId="47"/>
+        <pc:sldMkLst>
+          <pc:docMk/>
+          <pc:sldMk cId="1895128042" sldId="299"/>
+        </pc:sldMkLst>
+      </pc:sldChg>
+      <pc:sldChg chg="del">
+        <pc:chgData name="Zonghua Gu" userId="9a7e1853e1951ef5" providerId="LiveId" clId="{CF1FAA12-072C-4ED5-BA76-0FFFAEFDB88A}" dt="2025-10-07T21:33:07.535" v="70" actId="47"/>
+        <pc:sldMkLst>
+          <pc:docMk/>
+          <pc:sldMk cId="1849241118" sldId="302"/>
+        </pc:sldMkLst>
+      </pc:sldChg>
+      <pc:sldChg chg="del">
+        <pc:chgData name="Zonghua Gu" userId="9a7e1853e1951ef5" providerId="LiveId" clId="{CF1FAA12-072C-4ED5-BA76-0FFFAEFDB88A}" dt="2025-10-07T21:29:04.496" v="61" actId="47"/>
+        <pc:sldMkLst>
+          <pc:docMk/>
+          <pc:sldMk cId="2863756120" sldId="304"/>
+        </pc:sldMkLst>
+      </pc:sldChg>
+      <pc:sldChg chg="del">
+        <pc:chgData name="Zonghua Gu" userId="9a7e1853e1951ef5" providerId="LiveId" clId="{CF1FAA12-072C-4ED5-BA76-0FFFAEFDB88A}" dt="2025-10-07T21:29:23.623" v="62" actId="47"/>
+        <pc:sldMkLst>
+          <pc:docMk/>
+          <pc:sldMk cId="3866271372" sldId="309"/>
+        </pc:sldMkLst>
       </pc:sldChg>
       <pc:sldChg chg="modSp mod">
         <pc:chgData name="Zonghua Gu" userId="9a7e1853e1951ef5" providerId="LiveId" clId="{CF1FAA12-072C-4ED5-BA76-0FFFAEFDB88A}" dt="2025-10-07T13:12:46.888" v="43" actId="20577"/>
@@ -8040,21 +8138,109 @@
         </p:nvSpPr>
         <p:spPr/>
         <p:txBody>
-          <a:bodyPr>
-            <a:normAutofit fontScale="90000"/>
-          </a:bodyPr>
+          <a:bodyPr/>
           <a:lstStyle/>
           <a:p>
             <a:r>
               <a:rPr lang="en-US" dirty="0"/>
-              <a:t>Stacking and Unstacking upon Interrupt with FPU</a:t>
+              <a:t>Mixing C and Assembly</a:t>
             </a:r>
           </a:p>
         </p:txBody>
       </p:sp>
       <p:sp>
         <p:nvSpPr>
-          <p:cNvPr id="3" name="Slide Number Placeholder 2"/>
+          <p:cNvPr id="3" name="Content Placeholder 2"/>
+          <p:cNvSpPr>
+            <a:spLocks noGrp="1"/>
+          </p:cNvSpPr>
+          <p:nvPr>
+            <p:ph sz="quarter" idx="1"/>
+          </p:nvPr>
+        </p:nvSpPr>
+        <p:spPr/>
+        <p:txBody>
+          <a:bodyPr/>
+          <a:lstStyle/>
+          <a:p>
+            <a:r>
+              <a:rPr lang="en-US" dirty="0"/>
+              <a:t>Accessing C variables</a:t>
+            </a:r>
+          </a:p>
+          <a:p>
+            <a:pPr lvl="1"/>
+            <a:r>
+              <a:rPr lang="en-US" dirty="0" err="1"/>
+              <a:t>Struct</a:t>
+            </a:r>
+            <a:r>
+              <a:rPr lang="en-US" dirty="0"/>
+              <a:t> &amp; Data alignment</a:t>
+            </a:r>
+          </a:p>
+          <a:p>
+            <a:pPr lvl="1"/>
+            <a:r>
+              <a:rPr lang="en-US" dirty="0"/>
+              <a:t>Static variables</a:t>
+            </a:r>
+          </a:p>
+          <a:p>
+            <a:r>
+              <a:rPr lang="en-US" dirty="0"/>
+              <a:t>Inline Assembly</a:t>
+            </a:r>
+          </a:p>
+          <a:p>
+            <a:r>
+              <a:rPr lang="en-US" dirty="0"/>
+              <a:t>C calling assembly functions</a:t>
+            </a:r>
+          </a:p>
+          <a:p>
+            <a:pPr lvl="1"/>
+            <a:r>
+              <a:rPr lang="en-US" dirty="0"/>
+              <a:t>C: extern assembly functions and variables</a:t>
+            </a:r>
+          </a:p>
+          <a:p>
+            <a:pPr lvl="1"/>
+            <a:r>
+              <a:rPr lang="en-US" dirty="0"/>
+              <a:t>Assembly: Export</a:t>
+            </a:r>
+          </a:p>
+          <a:p>
+            <a:r>
+              <a:rPr lang="en-US" dirty="0"/>
+              <a:t>Assembly calling C functions</a:t>
+            </a:r>
+          </a:p>
+          <a:p>
+            <a:pPr lvl="1"/>
+            <a:r>
+              <a:rPr lang="en-US" dirty="0"/>
+              <a:t>Assembly: Import C function and variables</a:t>
+            </a:r>
+          </a:p>
+          <a:p>
+            <a:pPr lvl="1"/>
+            <a:r>
+              <a:rPr lang="en-US" dirty="0"/>
+              <a:t>Export variables to C functions</a:t>
+            </a:r>
+          </a:p>
+          <a:p>
+            <a:pPr lvl="1"/>
+            <a:endParaRPr lang="en-US" dirty="0"/>
+          </a:p>
+        </p:txBody>
+      </p:sp>
+      <p:sp>
+        <p:nvSpPr>
+          <p:cNvPr id="4" name="Slide Number Placeholder 3"/>
           <p:cNvSpPr>
             <a:spLocks noGrp="1"/>
           </p:cNvSpPr>
@@ -8067,48 +8253,20 @@
           <a:bodyPr/>
           <a:lstStyle/>
           <a:p>
+            <a:pPr eaLnBrk="1" latinLnBrk="0" hangingPunct="1"/>
             <a:fld id="{EA7C8D44-3667-46F6-9772-CC52308E2A7F}" type="slidenum">
               <a:rPr kumimoji="0" lang="en-US" smtClean="0"/>
-              <a:pPr/>
+              <a:pPr eaLnBrk="1" latinLnBrk="0" hangingPunct="1"/>
               <a:t>12</a:t>
             </a:fld>
             <a:endParaRPr kumimoji="0" lang="en-US" dirty="0"/>
           </a:p>
         </p:txBody>
       </p:sp>
-      <p:pic>
-        <p:nvPicPr>
-          <p:cNvPr id="5" name="Content Placeholder 4"/>
-          <p:cNvPicPr>
-            <a:picLocks noGrp="1" noChangeAspect="1"/>
-          </p:cNvPicPr>
-          <p:nvPr>
-            <p:ph sz="quarter" idx="1"/>
-          </p:nvPr>
-        </p:nvPicPr>
-        <p:blipFill>
-          <a:blip r:embed="rId2" cstate="print">
-            <a:extLst>
-              <a:ext uri="{28A0092B-C50C-407E-A947-70E740481C1C}">
-                <a14:useLocalDpi xmlns:a14="http://schemas.microsoft.com/office/drawing/2010/main" val="0"/>
-              </a:ext>
-            </a:extLst>
-          </a:blip>
-          <a:stretch>
-            <a:fillRect/>
-          </a:stretch>
-        </p:blipFill>
-        <p:spPr>
-          <a:xfrm>
-            <a:off x="2133600" y="1371600"/>
-            <a:ext cx="4812284" cy="4832545"/>
-          </a:xfrm>
-        </p:spPr>
-      </p:pic>
     </p:spTree>
     <p:extLst>
       <p:ext uri="{BB962C8B-B14F-4D97-AF65-F5344CB8AC3E}">
-        <p14:creationId xmlns:p14="http://schemas.microsoft.com/office/powerpoint/2010/main" val="1620139945"/>
+        <p14:creationId xmlns:p14="http://schemas.microsoft.com/office/powerpoint/2010/main" val="3190395533"/>
       </p:ext>
     </p:extLst>
   </p:cSld>
@@ -8147,173 +8305,6 @@
         </p:nvSpPr>
         <p:spPr/>
         <p:txBody>
-          <a:bodyPr/>
-          <a:lstStyle/>
-          <a:p>
-            <a:r>
-              <a:rPr lang="en-US" dirty="0"/>
-              <a:t>Mixing C and Assembly</a:t>
-            </a:r>
-          </a:p>
-        </p:txBody>
-      </p:sp>
-      <p:sp>
-        <p:nvSpPr>
-          <p:cNvPr id="3" name="Content Placeholder 2"/>
-          <p:cNvSpPr>
-            <a:spLocks noGrp="1"/>
-          </p:cNvSpPr>
-          <p:nvPr>
-            <p:ph sz="quarter" idx="1"/>
-          </p:nvPr>
-        </p:nvSpPr>
-        <p:spPr/>
-        <p:txBody>
-          <a:bodyPr/>
-          <a:lstStyle/>
-          <a:p>
-            <a:r>
-              <a:rPr lang="en-US" dirty="0"/>
-              <a:t>Accessing C variables</a:t>
-            </a:r>
-          </a:p>
-          <a:p>
-            <a:pPr lvl="1"/>
-            <a:r>
-              <a:rPr lang="en-US" dirty="0" err="1"/>
-              <a:t>Struct</a:t>
-            </a:r>
-            <a:r>
-              <a:rPr lang="en-US" dirty="0"/>
-              <a:t> &amp; Data alignment</a:t>
-            </a:r>
-          </a:p>
-          <a:p>
-            <a:pPr lvl="1"/>
-            <a:r>
-              <a:rPr lang="en-US" dirty="0"/>
-              <a:t>Static variables</a:t>
-            </a:r>
-          </a:p>
-          <a:p>
-            <a:r>
-              <a:rPr lang="en-US" dirty="0"/>
-              <a:t>Inline Assembly</a:t>
-            </a:r>
-          </a:p>
-          <a:p>
-            <a:r>
-              <a:rPr lang="en-US" dirty="0"/>
-              <a:t>C calling assembly functions</a:t>
-            </a:r>
-          </a:p>
-          <a:p>
-            <a:pPr lvl="1"/>
-            <a:r>
-              <a:rPr lang="en-US" dirty="0"/>
-              <a:t>C: extern assembly functions and variables</a:t>
-            </a:r>
-          </a:p>
-          <a:p>
-            <a:pPr lvl="1"/>
-            <a:r>
-              <a:rPr lang="en-US" dirty="0"/>
-              <a:t>Assembly: Export</a:t>
-            </a:r>
-          </a:p>
-          <a:p>
-            <a:r>
-              <a:rPr lang="en-US" dirty="0"/>
-              <a:t>Assembly calling C functions</a:t>
-            </a:r>
-          </a:p>
-          <a:p>
-            <a:pPr lvl="1"/>
-            <a:r>
-              <a:rPr lang="en-US" dirty="0"/>
-              <a:t>Assembly: Import C function and variables</a:t>
-            </a:r>
-          </a:p>
-          <a:p>
-            <a:pPr lvl="1"/>
-            <a:r>
-              <a:rPr lang="en-US" dirty="0"/>
-              <a:t>Export variables to C functions</a:t>
-            </a:r>
-          </a:p>
-          <a:p>
-            <a:pPr lvl="1"/>
-            <a:endParaRPr lang="en-US" dirty="0"/>
-          </a:p>
-        </p:txBody>
-      </p:sp>
-      <p:sp>
-        <p:nvSpPr>
-          <p:cNvPr id="4" name="Slide Number Placeholder 3"/>
-          <p:cNvSpPr>
-            <a:spLocks noGrp="1"/>
-          </p:cNvSpPr>
-          <p:nvPr>
-            <p:ph type="sldNum" sz="quarter" idx="12"/>
-          </p:nvPr>
-        </p:nvSpPr>
-        <p:spPr/>
-        <p:txBody>
-          <a:bodyPr/>
-          <a:lstStyle/>
-          <a:p>
-            <a:pPr eaLnBrk="1" latinLnBrk="0" hangingPunct="1"/>
-            <a:fld id="{EA7C8D44-3667-46F6-9772-CC52308E2A7F}" type="slidenum">
-              <a:rPr kumimoji="0" lang="en-US" smtClean="0"/>
-              <a:pPr eaLnBrk="1" latinLnBrk="0" hangingPunct="1"/>
-              <a:t>13</a:t>
-            </a:fld>
-            <a:endParaRPr kumimoji="0" lang="en-US" dirty="0"/>
-          </a:p>
-        </p:txBody>
-      </p:sp>
-    </p:spTree>
-    <p:extLst>
-      <p:ext uri="{BB962C8B-B14F-4D97-AF65-F5344CB8AC3E}">
-        <p14:creationId xmlns:p14="http://schemas.microsoft.com/office/powerpoint/2010/main" val="3190395533"/>
-      </p:ext>
-    </p:extLst>
-  </p:cSld>
-  <p:clrMapOvr>
-    <a:masterClrMapping/>
-  </p:clrMapOvr>
-</p:sld>
-</file>
-
-<file path=ppt/slides/slide14.xml><?xml version="1.0" encoding="utf-8"?>
-<p:sld xmlns:a="http://schemas.openxmlformats.org/drawingml/2006/main" xmlns:r="http://schemas.openxmlformats.org/officeDocument/2006/relationships" xmlns:p="http://schemas.openxmlformats.org/presentationml/2006/main">
-  <p:cSld>
-    <p:spTree>
-      <p:nvGrpSpPr>
-        <p:cNvPr id="1" name=""/>
-        <p:cNvGrpSpPr/>
-        <p:nvPr/>
-      </p:nvGrpSpPr>
-      <p:grpSpPr>
-        <a:xfrm>
-          <a:off x="0" y="0"/>
-          <a:ext cx="0" cy="0"/>
-          <a:chOff x="0" y="0"/>
-          <a:chExt cx="0" cy="0"/>
-        </a:xfrm>
-      </p:grpSpPr>
-      <p:sp>
-        <p:nvSpPr>
-          <p:cNvPr id="2" name="Title 1"/>
-          <p:cNvSpPr>
-            <a:spLocks noGrp="1"/>
-          </p:cNvSpPr>
-          <p:nvPr>
-            <p:ph type="title"/>
-          </p:nvPr>
-        </p:nvSpPr>
-        <p:spPr/>
-        <p:txBody>
           <a:bodyPr>
             <a:normAutofit fontScale="90000"/>
           </a:bodyPr>
@@ -8360,7 +8351,7 @@
             <a:fld id="{EA7C8D44-3667-46F6-9772-CC52308E2A7F}" type="slidenum">
               <a:rPr kumimoji="0" lang="en-US" smtClean="0"/>
               <a:pPr/>
-              <a:t>14</a:t>
+              <a:t>13</a:t>
             </a:fld>
             <a:endParaRPr kumimoji="0" lang="en-US" dirty="0"/>
           </a:p>
@@ -9037,7 +9028,7 @@
 </p:sld>
 </file>
 
-<file path=ppt/slides/slide15.xml><?xml version="1.0" encoding="utf-8"?>
+<file path=ppt/slides/slide14.xml><?xml version="1.0" encoding="utf-8"?>
 <p:sld xmlns:a="http://schemas.openxmlformats.org/drawingml/2006/main" xmlns:r="http://schemas.openxmlformats.org/officeDocument/2006/relationships" xmlns:p="http://schemas.openxmlformats.org/presentationml/2006/main">
   <p:cSld>
     <p:spTree>
@@ -9112,7 +9103,7 @@
             <a:fld id="{EA7C8D44-3667-46F6-9772-CC52308E2A7F}" type="slidenum">
               <a:rPr kumimoji="0" lang="en-US" smtClean="0"/>
               <a:pPr/>
-              <a:t>15</a:t>
+              <a:t>14</a:t>
             </a:fld>
             <a:endParaRPr kumimoji="0" lang="en-US" dirty="0"/>
           </a:p>
@@ -9728,7 +9719,7 @@
 </p:sld>
 </file>
 
-<file path=ppt/slides/slide16.xml><?xml version="1.0" encoding="utf-8"?>
+<file path=ppt/slides/slide15.xml><?xml version="1.0" encoding="utf-8"?>
 <p:sld xmlns:a="http://schemas.openxmlformats.org/drawingml/2006/main" xmlns:r="http://schemas.openxmlformats.org/officeDocument/2006/relationships" xmlns:p="http://schemas.openxmlformats.org/presentationml/2006/main">
   <p:cSld>
     <p:spTree>
@@ -9802,7 +9793,7 @@
             <a:fld id="{EA7C8D44-3667-46F6-9772-CC52308E2A7F}" type="slidenum">
               <a:rPr kumimoji="0" lang="en-US" smtClean="0"/>
               <a:pPr/>
-              <a:t>16</a:t>
+              <a:t>15</a:t>
             </a:fld>
             <a:endParaRPr kumimoji="0" lang="en-US" dirty="0"/>
           </a:p>
@@ -10056,313 +10047,7 @@
 </p:sld>
 </file>
 
-<file path=ppt/slides/slide17.xml><?xml version="1.0" encoding="utf-8"?>
-<p:sld xmlns:a="http://schemas.openxmlformats.org/drawingml/2006/main" xmlns:r="http://schemas.openxmlformats.org/officeDocument/2006/relationships" xmlns:p="http://schemas.openxmlformats.org/presentationml/2006/main">
-  <p:cSld>
-    <p:spTree>
-      <p:nvGrpSpPr>
-        <p:cNvPr id="1" name=""/>
-        <p:cNvGrpSpPr/>
-        <p:nvPr/>
-      </p:nvGrpSpPr>
-      <p:grpSpPr>
-        <a:xfrm>
-          <a:off x="0" y="0"/>
-          <a:ext cx="0" cy="0"/>
-          <a:chOff x="0" y="0"/>
-          <a:chExt cx="0" cy="0"/>
-        </a:xfrm>
-      </p:grpSpPr>
-      <p:sp>
-        <p:nvSpPr>
-          <p:cNvPr id="2" name="Title 1"/>
-          <p:cNvSpPr>
-            <a:spLocks noGrp="1"/>
-          </p:cNvSpPr>
-          <p:nvPr>
-            <p:ph type="title"/>
-          </p:nvPr>
-        </p:nvSpPr>
-        <p:spPr/>
-        <p:txBody>
-          <a:bodyPr>
-            <a:normAutofit fontScale="90000"/>
-          </a:bodyPr>
-          <a:lstStyle/>
-          <a:p>
-            <a:r>
-              <a:rPr lang="en-US" dirty="0"/>
-              <a:t>Fixed-point Division</a:t>
-            </a:r>
-            <a:br>
-              <a:rPr lang="en-US" dirty="0"/>
-            </a:br>
-            <a:r>
-              <a:rPr lang="en-US" dirty="0"/>
-              <a:t>in UQ16.16 or Q15.16</a:t>
-            </a:r>
-          </a:p>
-        </p:txBody>
-      </p:sp>
-      <p:sp>
-        <p:nvSpPr>
-          <p:cNvPr id="3" name="Slide Number Placeholder 2"/>
-          <p:cNvSpPr>
-            <a:spLocks noGrp="1"/>
-          </p:cNvSpPr>
-          <p:nvPr>
-            <p:ph type="sldNum" sz="quarter" idx="12"/>
-          </p:nvPr>
-        </p:nvSpPr>
-        <p:spPr/>
-        <p:txBody>
-          <a:bodyPr/>
-          <a:lstStyle/>
-          <a:p>
-            <a:fld id="{EA7C8D44-3667-46F6-9772-CC52308E2A7F}" type="slidenum">
-              <a:rPr kumimoji="0" lang="en-US" smtClean="0"/>
-              <a:pPr/>
-              <a:t>17</a:t>
-            </a:fld>
-            <a:endParaRPr kumimoji="0" lang="en-US" dirty="0"/>
-          </a:p>
-        </p:txBody>
-      </p:sp>
-      <p:sp>
-        <p:nvSpPr>
-          <p:cNvPr id="4" name="Content Placeholder 3"/>
-          <p:cNvSpPr>
-            <a:spLocks noGrp="1"/>
-          </p:cNvSpPr>
-          <p:nvPr>
-            <p:ph sz="quarter" idx="1"/>
-          </p:nvPr>
-        </p:nvSpPr>
-        <p:spPr>
-          <a:xfrm>
-            <a:off x="152399" y="3276600"/>
-            <a:ext cx="8915401" cy="2194560"/>
-          </a:xfrm>
-        </p:spPr>
-        <p:txBody>
-          <a:bodyPr>
-            <a:noAutofit/>
-          </a:bodyPr>
-          <a:lstStyle/>
-          <a:p>
-            <a:pPr marL="0" indent="0">
-              <a:buNone/>
-            </a:pPr>
-            <a:r>
-              <a:rPr lang="en-US" sz="1800" b="1" dirty="0">
-                <a:latin typeface="Consolas" panose="020B0609020204030204" pitchFamily="49" charset="0"/>
-                <a:cs typeface="Consolas" panose="020B0609020204030204" pitchFamily="49" charset="0"/>
-              </a:rPr>
-              <a:t>ASRS  r1, r0, #31          ; r1[31:0] = sign bits of A</a:t>
-            </a:r>
-          </a:p>
-          <a:p>
-            <a:pPr marL="0" indent="0">
-              <a:buNone/>
-            </a:pPr>
-            <a:r>
-              <a:rPr lang="en-US" sz="1800" b="1" dirty="0">
-                <a:latin typeface="Consolas" panose="020B0609020204030204" pitchFamily="49" charset="0"/>
-                <a:cs typeface="Consolas" panose="020B0609020204030204" pitchFamily="49" charset="0"/>
-              </a:rPr>
-              <a:t>LSLS  r1, r1, #16          ; put sign bits in upper half word</a:t>
-            </a:r>
-          </a:p>
-          <a:p>
-            <a:pPr marL="0" indent="0">
-              <a:buNone/>
-            </a:pPr>
-            <a:r>
-              <a:rPr lang="en-US" sz="1800" b="1" dirty="0">
-                <a:latin typeface="Consolas" panose="020B0609020204030204" pitchFamily="49" charset="0"/>
-                <a:cs typeface="Consolas" panose="020B0609020204030204" pitchFamily="49" charset="0"/>
-              </a:rPr>
-              <a:t>ORR   r1, r1, r0, LSR #16    </a:t>
-            </a:r>
-          </a:p>
-          <a:p>
-            <a:pPr marL="0" indent="0">
-              <a:buNone/>
-            </a:pPr>
-            <a:r>
-              <a:rPr lang="en-US" sz="1800" b="1" dirty="0">
-                <a:latin typeface="Consolas" panose="020B0609020204030204" pitchFamily="49" charset="0"/>
-                <a:cs typeface="Consolas" panose="020B0609020204030204" pitchFamily="49" charset="0"/>
-              </a:rPr>
-              <a:t>LSLS  r0, r0, #16          ; [r1:r0] stores sign extended A</a:t>
-            </a:r>
-          </a:p>
-          <a:p>
-            <a:pPr marL="0" indent="0">
-              <a:buNone/>
-            </a:pPr>
-            <a:r>
-              <a:rPr lang="en-US" sz="1800" b="1" dirty="0">
-                <a:latin typeface="Consolas" panose="020B0609020204030204" pitchFamily="49" charset="0"/>
-                <a:cs typeface="Consolas" panose="020B0609020204030204" pitchFamily="49" charset="0"/>
-              </a:rPr>
-              <a:t>ASRS  r3, r2, #31          ; [r4:r3] stores sign extended B</a:t>
-            </a:r>
-          </a:p>
-          <a:p>
-            <a:pPr marL="0" indent="0">
-              <a:buNone/>
-            </a:pPr>
-            <a:r>
-              <a:rPr lang="en-US" sz="1800" b="1" dirty="0">
-                <a:latin typeface="Consolas" panose="020B0609020204030204" pitchFamily="49" charset="0"/>
-                <a:cs typeface="Consolas" panose="020B0609020204030204" pitchFamily="49" charset="0"/>
-              </a:rPr>
-              <a:t>BL    </a:t>
-            </a:r>
-            <a:r>
-              <a:rPr lang="en-US" sz="1800" b="1" i="1" dirty="0">
-                <a:solidFill>
-                  <a:srgbClr val="FF0000"/>
-                </a:solidFill>
-                <a:latin typeface="Consolas" panose="020B0609020204030204" pitchFamily="49" charset="0"/>
-                <a:cs typeface="Consolas" panose="020B0609020204030204" pitchFamily="49" charset="0"/>
-              </a:rPr>
-              <a:t>division_64_bits</a:t>
-            </a:r>
-            <a:r>
-              <a:rPr lang="en-US" sz="1800" b="1" dirty="0">
-                <a:latin typeface="Consolas" panose="020B0609020204030204" pitchFamily="49" charset="0"/>
-                <a:cs typeface="Consolas" panose="020B0609020204030204" pitchFamily="49" charset="0"/>
-              </a:rPr>
-              <a:t>     ; Take four input register (r0:r1, r3:r4)</a:t>
-            </a:r>
-          </a:p>
-          <a:p>
-            <a:pPr marL="0" indent="0">
-              <a:buNone/>
-            </a:pPr>
-            <a:r>
-              <a:rPr lang="en-US" sz="1800" b="1" dirty="0">
-                <a:latin typeface="Consolas" panose="020B0609020204030204" pitchFamily="49" charset="0"/>
-                <a:cs typeface="Consolas" panose="020B0609020204030204" pitchFamily="49" charset="0"/>
-              </a:rPr>
-              <a:t>MOV   r4, r0               ; division_64_bits places result in r0</a:t>
-            </a:r>
-          </a:p>
-        </p:txBody>
-      </p:sp>
-      <p:pic>
-        <p:nvPicPr>
-          <p:cNvPr id="5" name="Picture 2"/>
-          <p:cNvPicPr>
-            <a:picLocks noChangeAspect="1" noChangeArrowheads="1"/>
-          </p:cNvPicPr>
-          <p:nvPr/>
-        </p:nvPicPr>
-        <p:blipFill>
-          <a:blip r:embed="rId2" cstate="print">
-            <a:extLst>
-              <a:ext uri="{28A0092B-C50C-407E-A947-70E740481C1C}">
-                <a14:useLocalDpi xmlns:a14="http://schemas.microsoft.com/office/drawing/2010/main" val="0"/>
-              </a:ext>
-            </a:extLst>
-          </a:blip>
-          <a:srcRect/>
-          <a:stretch>
-            <a:fillRect/>
-          </a:stretch>
-        </p:blipFill>
-        <p:spPr bwMode="auto">
-          <a:xfrm>
-            <a:off x="152399" y="1408864"/>
-            <a:ext cx="5511225" cy="1334336"/>
-          </a:xfrm>
-          <a:prstGeom prst="rect">
-            <a:avLst/>
-          </a:prstGeom>
-          <a:noFill/>
-          <a:ln>
-            <a:noFill/>
-          </a:ln>
-          <a:extLst>
-            <a:ext uri="{909E8E84-426E-40DD-AFC4-6F175D3DCCD1}">
-              <a14:hiddenFill xmlns:a14="http://schemas.microsoft.com/office/drawing/2010/main">
-                <a:solidFill>
-                  <a:schemeClr val="accent1"/>
-                </a:solidFill>
-              </a14:hiddenFill>
-            </a:ext>
-            <a:ext uri="{91240B29-F687-4F45-9708-019B960494DF}">
-              <a14:hiddenLine xmlns:a14="http://schemas.microsoft.com/office/drawing/2010/main" w="9525">
-                <a:solidFill>
-                  <a:schemeClr val="tx1"/>
-                </a:solidFill>
-                <a:miter lim="800000"/>
-                <a:headEnd/>
-                <a:tailEnd/>
-              </a14:hiddenLine>
-            </a:ext>
-          </a:extLst>
-        </p:spPr>
-      </p:pic>
-      <p:sp>
-        <p:nvSpPr>
-          <p:cNvPr id="6" name="Rectangle 5"/>
-          <p:cNvSpPr/>
-          <p:nvPr/>
-        </p:nvSpPr>
-        <p:spPr>
-          <a:xfrm>
-            <a:off x="5791200" y="1600200"/>
-            <a:ext cx="3429000" cy="646331"/>
-          </a:xfrm>
-          <a:prstGeom prst="rect">
-            <a:avLst/>
-          </a:prstGeom>
-        </p:spPr>
-        <p:txBody>
-          <a:bodyPr wrap="square">
-            <a:spAutoFit/>
-          </a:bodyPr>
-          <a:lstStyle/>
-          <a:p>
-            <a:r>
-              <a:rPr lang="en-US" dirty="0">
-                <a:latin typeface="Consolas" panose="020B0609020204030204" pitchFamily="49" charset="0"/>
-                <a:ea typeface="宋体" panose="02010600030101010101" pitchFamily="2" charset="-122"/>
-                <a:cs typeface="Times New Roman" panose="02020603050405020304" pitchFamily="18" charset="0"/>
-              </a:rPr>
-              <a:t>r4 = fixed-point quotient </a:t>
-            </a:r>
-          </a:p>
-          <a:p>
-            <a:r>
-              <a:rPr lang="en-US" dirty="0">
-                <a:latin typeface="Consolas" panose="020B0609020204030204" pitchFamily="49" charset="0"/>
-                <a:ea typeface="宋体" panose="02010600030101010101" pitchFamily="2" charset="-122"/>
-                <a:cs typeface="Times New Roman" panose="02020603050405020304" pitchFamily="18" charset="0"/>
-              </a:rPr>
-              <a:t>   = A ÷ B</a:t>
-            </a:r>
-            <a:endParaRPr lang="en-US" dirty="0"/>
-          </a:p>
-        </p:txBody>
-      </p:sp>
-    </p:spTree>
-    <p:extLst>
-      <p:ext uri="{BB962C8B-B14F-4D97-AF65-F5344CB8AC3E}">
-        <p14:creationId xmlns:p14="http://schemas.microsoft.com/office/powerpoint/2010/main" val="2863756120"/>
-      </p:ext>
-    </p:extLst>
-  </p:cSld>
-  <p:clrMapOvr>
-    <a:masterClrMapping/>
-  </p:clrMapOvr>
-</p:sld>
-</file>
-
-<file path=ppt/slides/slide18.xml><?xml version="1.0" encoding="utf-8"?>
+<file path=ppt/slides/slide16.xml><?xml version="1.0" encoding="utf-8"?>
 <p:sld xmlns:a="http://schemas.openxmlformats.org/drawingml/2006/main" xmlns:r="http://schemas.openxmlformats.org/officeDocument/2006/relationships" xmlns:p="http://schemas.openxmlformats.org/presentationml/2006/main">
   <p:cSld>
     <p:spTree>
@@ -10432,7 +10117,7 @@
             <a:fld id="{EA7C8D44-3667-46F6-9772-CC52308E2A7F}" type="slidenum">
               <a:rPr kumimoji="0" lang="en-US" smtClean="0"/>
               <a:pPr/>
-              <a:t>18</a:t>
+              <a:t>16</a:t>
             </a:fld>
             <a:endParaRPr kumimoji="0" lang="en-US" dirty="0"/>
           </a:p>
@@ -10717,7 +10402,7 @@
 </p:sld>
 </file>
 
-<file path=ppt/slides/slide19.xml><?xml version="1.0" encoding="utf-8"?>
+<file path=ppt/slides/slide17.xml><?xml version="1.0" encoding="utf-8"?>
 <p:sld xmlns:a="http://schemas.openxmlformats.org/drawingml/2006/main" xmlns:r="http://schemas.openxmlformats.org/officeDocument/2006/relationships" xmlns:p="http://schemas.openxmlformats.org/presentationml/2006/main">
   <p:cSld>
     <p:spTree>
@@ -10798,7 +10483,7 @@
             <a:fld id="{EA7C8D44-3667-46F6-9772-CC52308E2A7F}" type="slidenum">
               <a:rPr kumimoji="0" lang="en-US" smtClean="0"/>
               <a:pPr/>
-              <a:t>19</a:t>
+              <a:t>17</a:t>
             </a:fld>
             <a:endParaRPr kumimoji="0" lang="en-US" dirty="0"/>
           </a:p>
@@ -11301,187 +10986,7 @@
 </p:sld>
 </file>
 
-<file path=ppt/slides/slide2.xml><?xml version="1.0" encoding="utf-8"?>
-<p:sld xmlns:a="http://schemas.openxmlformats.org/drawingml/2006/main" xmlns:r="http://schemas.openxmlformats.org/officeDocument/2006/relationships" xmlns:p="http://schemas.openxmlformats.org/presentationml/2006/main">
-  <p:cSld>
-    <p:spTree>
-      <p:nvGrpSpPr>
-        <p:cNvPr id="1" name=""/>
-        <p:cNvGrpSpPr/>
-        <p:nvPr/>
-      </p:nvGrpSpPr>
-      <p:grpSpPr>
-        <a:xfrm>
-          <a:off x="0" y="0"/>
-          <a:ext cx="0" cy="0"/>
-          <a:chOff x="0" y="0"/>
-          <a:chExt cx="0" cy="0"/>
-        </a:xfrm>
-      </p:grpSpPr>
-      <p:sp>
-        <p:nvSpPr>
-          <p:cNvPr id="3" name="Slide Number Placeholder 2"/>
-          <p:cNvSpPr>
-            <a:spLocks noGrp="1"/>
-          </p:cNvSpPr>
-          <p:nvPr>
-            <p:ph type="sldNum" sz="quarter" idx="12"/>
-          </p:nvPr>
-        </p:nvSpPr>
-        <p:spPr/>
-        <p:txBody>
-          <a:bodyPr/>
-          <a:lstStyle/>
-          <a:p>
-            <a:fld id="{AEE14D4A-FE32-40AF-B06D-E9622816B101}" type="slidenum">
-              <a:rPr lang="en-US" smtClean="0"/>
-              <a:pPr/>
-              <a:t>2</a:t>
-            </a:fld>
-            <a:endParaRPr lang="en-US" dirty="0"/>
-          </a:p>
-        </p:txBody>
-      </p:sp>
-      <p:pic>
-        <p:nvPicPr>
-          <p:cNvPr id="5" name="Content Placeholder 4" descr="singer_ikea.gif"/>
-          <p:cNvPicPr>
-            <a:picLocks noGrp="1" noChangeAspect="1"/>
-          </p:cNvPicPr>
-          <p:nvPr>
-            <p:ph sz="quarter" idx="1"/>
-          </p:nvPr>
-        </p:nvPicPr>
-        <p:blipFill>
-          <a:blip r:embed="rId2" cstate="print"/>
-          <a:stretch>
-            <a:fillRect/>
-          </a:stretch>
-        </p:blipFill>
-        <p:spPr>
-          <a:xfrm>
-            <a:off x="2438400" y="1295400"/>
-            <a:ext cx="3965455" cy="5002175"/>
-          </a:xfrm>
-        </p:spPr>
-      </p:pic>
-      <p:sp>
-        <p:nvSpPr>
-          <p:cNvPr id="6" name="Oval 5"/>
-          <p:cNvSpPr/>
-          <p:nvPr/>
-        </p:nvSpPr>
-        <p:spPr>
-          <a:xfrm>
-            <a:off x="2514600" y="3012558"/>
-            <a:ext cx="2764465" cy="797442"/>
-          </a:xfrm>
-          <a:prstGeom prst="ellipse">
-            <a:avLst/>
-          </a:prstGeom>
-          <a:noFill/>
-          <a:ln w="38100">
-            <a:solidFill>
-              <a:srgbClr val="C00000"/>
-            </a:solidFill>
-          </a:ln>
-        </p:spPr>
-        <p:style>
-          <a:lnRef idx="2">
-            <a:schemeClr val="accent1">
-              <a:shade val="50000"/>
-            </a:schemeClr>
-          </a:lnRef>
-          <a:fillRef idx="1">
-            <a:schemeClr val="accent1"/>
-          </a:fillRef>
-          <a:effectRef idx="0">
-            <a:schemeClr val="accent1"/>
-          </a:effectRef>
-          <a:fontRef idx="minor">
-            <a:schemeClr val="lt1"/>
-          </a:fontRef>
-        </p:style>
-        <p:txBody>
-          <a:bodyPr rtlCol="0" anchor="ctr"/>
-          <a:lstStyle/>
-          <a:p>
-            <a:pPr algn="ctr"/>
-            <a:endParaRPr lang="en-US"/>
-          </a:p>
-        </p:txBody>
-      </p:sp>
-      <p:sp>
-        <p:nvSpPr>
-          <p:cNvPr id="7" name="Title 1"/>
-          <p:cNvSpPr>
-            <a:spLocks noGrp="1"/>
-          </p:cNvSpPr>
-          <p:nvPr>
-            <p:ph type="title"/>
-          </p:nvPr>
-        </p:nvSpPr>
-        <p:spPr>
-          <a:xfrm>
-            <a:off x="457200" y="152400"/>
-            <a:ext cx="8229600" cy="990600"/>
-          </a:xfrm>
-        </p:spPr>
-        <p:txBody>
-          <a:bodyPr/>
-          <a:lstStyle/>
-          <a:p>
-            <a:pPr eaLnBrk="1" hangingPunct="1"/>
-            <a:r>
-              <a:rPr lang="en-US" dirty="0"/>
-              <a:t>Assembly Programs</a:t>
-            </a:r>
-          </a:p>
-        </p:txBody>
-      </p:sp>
-      <p:sp>
-        <p:nvSpPr>
-          <p:cNvPr id="2" name="Rectangle 1"/>
-          <p:cNvSpPr/>
-          <p:nvPr/>
-        </p:nvSpPr>
-        <p:spPr>
-          <a:xfrm>
-            <a:off x="6324600" y="5943600"/>
-            <a:ext cx="1643399" cy="261610"/>
-          </a:xfrm>
-          <a:prstGeom prst="rect">
-            <a:avLst/>
-          </a:prstGeom>
-        </p:spPr>
-        <p:txBody>
-          <a:bodyPr wrap="none">
-            <a:spAutoFit/>
-          </a:bodyPr>
-          <a:lstStyle/>
-          <a:p>
-            <a:r>
-              <a:rPr lang="en-US" sz="1100" i="1" dirty="0"/>
-              <a:t>http://www.andysinger.com/</a:t>
-            </a:r>
-          </a:p>
-        </p:txBody>
-      </p:sp>
-    </p:spTree>
-    <p:extLst>
-      <p:ext uri="{BB962C8B-B14F-4D97-AF65-F5344CB8AC3E}">
-        <p14:creationId xmlns:p14="http://schemas.microsoft.com/office/powerpoint/2010/main" val="420818316"/>
-      </p:ext>
-    </p:extLst>
-  </p:cSld>
-  <p:clrMapOvr>
-    <a:masterClrMapping/>
-  </p:clrMapOvr>
-  <p:transition/>
-</p:sld>
-</file>
-
-<file path=ppt/slides/slide20.xml><?xml version="1.0" encoding="utf-8"?>
+<file path=ppt/slides/slide18.xml><?xml version="1.0" encoding="utf-8"?>
 <p:sld xmlns:a="http://schemas.openxmlformats.org/drawingml/2006/main" xmlns:r="http://schemas.openxmlformats.org/officeDocument/2006/relationships" xmlns:p="http://schemas.openxmlformats.org/presentationml/2006/main">
   <p:cSld>
     <p:spTree>
@@ -11560,7 +11065,7 @@
             <a:fld id="{EA7C8D44-3667-46F6-9772-CC52308E2A7F}" type="slidenum">
               <a:rPr kumimoji="0" lang="en-US" smtClean="0"/>
               <a:pPr/>
-              <a:t>20</a:t>
+              <a:t>18</a:t>
             </a:fld>
             <a:endParaRPr kumimoji="0" lang="en-US" dirty="0"/>
           </a:p>
@@ -12156,7 +11661,7 @@
 </p:sld>
 </file>
 
-<file path=ppt/slides/slide21.xml><?xml version="1.0" encoding="utf-8"?>
+<file path=ppt/slides/slide19.xml><?xml version="1.0" encoding="utf-8"?>
 <p:sld xmlns:a="http://schemas.openxmlformats.org/drawingml/2006/main" xmlns:r="http://schemas.openxmlformats.org/officeDocument/2006/relationships" xmlns:p="http://schemas.openxmlformats.org/presentationml/2006/main">
   <p:cSld>
     <p:spTree>
@@ -12190,7 +11695,7 @@
           <a:p>
             <a:r>
               <a:rPr lang="en-US" dirty="0"/>
-              <a:t>Single-precision comparisons</a:t>
+              <a:t>Timer’s Clock</a:t>
             </a:r>
           </a:p>
         </p:txBody>
@@ -12213,2234 +11718,7 @@
             <a:fld id="{EA7C8D44-3667-46F6-9772-CC52308E2A7F}" type="slidenum">
               <a:rPr kumimoji="0" lang="en-US" smtClean="0"/>
               <a:pPr/>
-              <a:t>21</a:t>
-            </a:fld>
-            <a:endParaRPr kumimoji="0" lang="en-US" dirty="0"/>
-          </a:p>
-        </p:txBody>
-      </p:sp>
-      <p:graphicFrame>
-        <p:nvGraphicFramePr>
-          <p:cNvPr id="5" name="Content Placeholder 4"/>
-          <p:cNvGraphicFramePr>
-            <a:graphicFrameLocks noGrp="1"/>
-          </p:cNvGraphicFramePr>
-          <p:nvPr>
-            <p:ph sz="quarter" idx="1"/>
-          </p:nvPr>
-        </p:nvGraphicFramePr>
-        <p:xfrm>
-          <a:off x="762000" y="1524000"/>
-          <a:ext cx="7848600" cy="1195578"/>
-        </p:xfrm>
-        <a:graphic>
-          <a:graphicData uri="http://schemas.openxmlformats.org/drawingml/2006/table">
-            <a:tbl>
-              <a:tblPr bandRow="1">
-                <a:tableStyleId>{5C22544A-7EE6-4342-B048-85BDC9FD1C3A}</a:tableStyleId>
-              </a:tblPr>
-              <a:tblGrid>
-                <a:gridCol w="2688318">
-                  <a:extLst>
-                    <a:ext uri="{9D8B030D-6E8A-4147-A177-3AD203B41FA5}">
-                      <a16:colId xmlns:a16="http://schemas.microsoft.com/office/drawing/2014/main" val="20000"/>
-                    </a:ext>
-                  </a:extLst>
-                </a:gridCol>
-                <a:gridCol w="5160282">
-                  <a:extLst>
-                    <a:ext uri="{9D8B030D-6E8A-4147-A177-3AD203B41FA5}">
-                      <a16:colId xmlns:a16="http://schemas.microsoft.com/office/drawing/2014/main" val="20001"/>
-                    </a:ext>
-                  </a:extLst>
-                </a:gridCol>
-              </a:tblGrid>
-              <a:tr h="49530">
-                <a:tc>
-                  <a:txBody>
-                    <a:bodyPr/>
-                    <a:lstStyle/>
-                    <a:p>
-                      <a:pPr marL="0" marR="0" algn="just">
-                        <a:lnSpc>
-                          <a:spcPct val="115000"/>
-                        </a:lnSpc>
-                        <a:spcBef>
-                          <a:spcPts val="0"/>
-                        </a:spcBef>
-                        <a:spcAft>
-                          <a:spcPts val="0"/>
-                        </a:spcAft>
-                      </a:pPr>
-                      <a:r>
-                        <a:rPr lang="en-US" sz="1400" b="1" dirty="0">
-                          <a:solidFill>
-                            <a:srgbClr val="C00000"/>
-                          </a:solidFill>
-                          <a:effectLst/>
-                          <a:latin typeface="Consolas" panose="020B0609020204030204" pitchFamily="49" charset="0"/>
-                          <a:cs typeface="Consolas" panose="020B0609020204030204" pitchFamily="49" charset="0"/>
-                        </a:rPr>
-                        <a:t>VCMP.F32</a:t>
-                      </a:r>
-                      <a:r>
-                        <a:rPr lang="en-US" sz="1400" dirty="0">
-                          <a:effectLst/>
-                          <a:latin typeface="Consolas" panose="020B0609020204030204" pitchFamily="49" charset="0"/>
-                          <a:cs typeface="Consolas" panose="020B0609020204030204" pitchFamily="49" charset="0"/>
-                        </a:rPr>
-                        <a:t>  </a:t>
-                      </a:r>
-                      <a:r>
-                        <a:rPr lang="en-US" sz="1400" dirty="0" err="1">
-                          <a:effectLst/>
-                          <a:latin typeface="Consolas" panose="020B0609020204030204" pitchFamily="49" charset="0"/>
-                          <a:cs typeface="Consolas" panose="020B0609020204030204" pitchFamily="49" charset="0"/>
-                        </a:rPr>
-                        <a:t>Sd</a:t>
-                      </a:r>
-                      <a:r>
-                        <a:rPr lang="en-US" sz="1400" dirty="0">
-                          <a:effectLst/>
-                          <a:latin typeface="Consolas" panose="020B0609020204030204" pitchFamily="49" charset="0"/>
-                          <a:cs typeface="Consolas" panose="020B0609020204030204" pitchFamily="49" charset="0"/>
-                        </a:rPr>
-                        <a:t>, &lt;Sm | #0.0&gt;</a:t>
-                      </a:r>
-                      <a:endParaRPr lang="en-US" sz="1400" dirty="0">
-                        <a:effectLst/>
-                        <a:latin typeface="Consolas" panose="020B0609020204030204" pitchFamily="49" charset="0"/>
-                        <a:ea typeface="宋体" panose="02010600030101010101" pitchFamily="2" charset="-122"/>
-                        <a:cs typeface="Consolas" panose="020B0609020204030204" pitchFamily="49" charset="0"/>
-                      </a:endParaRPr>
-                    </a:p>
-                  </a:txBody>
-                  <a:tcPr marL="73025" marR="0" marT="0" marB="0" anchor="ctr"/>
-                </a:tc>
-                <a:tc>
-                  <a:txBody>
-                    <a:bodyPr/>
-                    <a:lstStyle/>
-                    <a:p>
-                      <a:pPr marL="0" marR="0" algn="l">
-                        <a:lnSpc>
-                          <a:spcPct val="115000"/>
-                        </a:lnSpc>
-                        <a:spcBef>
-                          <a:spcPts val="0"/>
-                        </a:spcBef>
-                        <a:spcAft>
-                          <a:spcPts val="0"/>
-                        </a:spcAft>
-                      </a:pPr>
-                      <a:r>
-                        <a:rPr lang="en-US" sz="1400">
-                          <a:effectLst/>
-                          <a:latin typeface="Consolas" panose="020B0609020204030204" pitchFamily="49" charset="0"/>
-                          <a:cs typeface="Consolas" panose="020B0609020204030204" pitchFamily="49" charset="0"/>
-                        </a:rPr>
-                        <a:t>Compare two floating-point registers, or one floating-point register and zero</a:t>
-                      </a:r>
-                      <a:endParaRPr lang="en-US" sz="1400">
-                        <a:effectLst/>
-                        <a:latin typeface="Consolas" panose="020B0609020204030204" pitchFamily="49" charset="0"/>
-                        <a:ea typeface="宋体" panose="02010600030101010101" pitchFamily="2" charset="-122"/>
-                        <a:cs typeface="Consolas" panose="020B0609020204030204" pitchFamily="49" charset="0"/>
-                      </a:endParaRPr>
-                    </a:p>
-                  </a:txBody>
-                  <a:tcPr marL="68580" marR="68580" marT="0" marB="0" anchor="ctr"/>
-                </a:tc>
-                <a:extLst>
-                  <a:ext uri="{0D108BD9-81ED-4DB2-BD59-A6C34878D82A}">
-                    <a16:rowId xmlns:a16="http://schemas.microsoft.com/office/drawing/2014/main" val="10000"/>
-                  </a:ext>
-                </a:extLst>
-              </a:tr>
-              <a:tr h="45720">
-                <a:tc>
-                  <a:txBody>
-                    <a:bodyPr/>
-                    <a:lstStyle/>
-                    <a:p>
-                      <a:pPr marL="0" marR="0" algn="just">
-                        <a:lnSpc>
-                          <a:spcPct val="115000"/>
-                        </a:lnSpc>
-                        <a:spcBef>
-                          <a:spcPts val="0"/>
-                        </a:spcBef>
-                        <a:spcAft>
-                          <a:spcPts val="0"/>
-                        </a:spcAft>
-                      </a:pPr>
-                      <a:r>
-                        <a:rPr lang="en-US" sz="1400" b="1" dirty="0">
-                          <a:solidFill>
-                            <a:srgbClr val="C00000"/>
-                          </a:solidFill>
-                          <a:effectLst/>
-                          <a:latin typeface="Consolas" panose="020B0609020204030204" pitchFamily="49" charset="0"/>
-                          <a:cs typeface="Consolas" panose="020B0609020204030204" pitchFamily="49" charset="0"/>
-                        </a:rPr>
-                        <a:t>VCMPE.F32</a:t>
-                      </a:r>
-                      <a:r>
-                        <a:rPr lang="en-US" sz="1400" dirty="0">
-                          <a:effectLst/>
-                          <a:latin typeface="Consolas" panose="020B0609020204030204" pitchFamily="49" charset="0"/>
-                          <a:cs typeface="Consolas" panose="020B0609020204030204" pitchFamily="49" charset="0"/>
-                        </a:rPr>
-                        <a:t> </a:t>
-                      </a:r>
-                      <a:r>
-                        <a:rPr lang="en-US" sz="1400" dirty="0" err="1">
-                          <a:effectLst/>
-                          <a:latin typeface="Consolas" panose="020B0609020204030204" pitchFamily="49" charset="0"/>
-                          <a:cs typeface="Consolas" panose="020B0609020204030204" pitchFamily="49" charset="0"/>
-                        </a:rPr>
-                        <a:t>Sd</a:t>
-                      </a:r>
-                      <a:r>
-                        <a:rPr lang="en-US" sz="1400" dirty="0">
-                          <a:effectLst/>
-                          <a:latin typeface="Consolas" panose="020B0609020204030204" pitchFamily="49" charset="0"/>
-                          <a:cs typeface="Consolas" panose="020B0609020204030204" pitchFamily="49" charset="0"/>
-                        </a:rPr>
-                        <a:t>, &lt;Sm | #0.0&gt;</a:t>
-                      </a:r>
-                      <a:endParaRPr lang="en-US" sz="1400" dirty="0">
-                        <a:effectLst/>
-                        <a:latin typeface="Consolas" panose="020B0609020204030204" pitchFamily="49" charset="0"/>
-                        <a:ea typeface="宋体" panose="02010600030101010101" pitchFamily="2" charset="-122"/>
-                        <a:cs typeface="Consolas" panose="020B0609020204030204" pitchFamily="49" charset="0"/>
-                      </a:endParaRPr>
-                    </a:p>
-                  </a:txBody>
-                  <a:tcPr marL="73025" marR="0" marT="0" marB="0" anchor="ctr"/>
-                </a:tc>
-                <a:tc>
-                  <a:txBody>
-                    <a:bodyPr/>
-                    <a:lstStyle/>
-                    <a:p>
-                      <a:pPr marL="0" marR="0" algn="l">
-                        <a:lnSpc>
-                          <a:spcPct val="115000"/>
-                        </a:lnSpc>
-                        <a:spcBef>
-                          <a:spcPts val="0"/>
-                        </a:spcBef>
-                        <a:spcAft>
-                          <a:spcPts val="0"/>
-                        </a:spcAft>
-                      </a:pPr>
-                      <a:r>
-                        <a:rPr lang="en-US" sz="1400" dirty="0">
-                          <a:effectLst/>
-                          <a:latin typeface="Consolas" panose="020B0609020204030204" pitchFamily="49" charset="0"/>
-                          <a:cs typeface="Consolas" panose="020B0609020204030204" pitchFamily="49" charset="0"/>
-                        </a:rPr>
-                        <a:t>Compare two floating-point registers, or one floating-point register and zero, and raise exception for a signaling NaN</a:t>
-                      </a:r>
-                      <a:endParaRPr lang="en-US" sz="1400" dirty="0">
-                        <a:effectLst/>
-                        <a:latin typeface="Consolas" panose="020B0609020204030204" pitchFamily="49" charset="0"/>
-                        <a:ea typeface="宋体" panose="02010600030101010101" pitchFamily="2" charset="-122"/>
-                        <a:cs typeface="Consolas" panose="020B0609020204030204" pitchFamily="49" charset="0"/>
-                      </a:endParaRPr>
-                    </a:p>
-                  </a:txBody>
-                  <a:tcPr marL="68580" marR="68580" marT="0" marB="0" anchor="ctr"/>
-                </a:tc>
-                <a:extLst>
-                  <a:ext uri="{0D108BD9-81ED-4DB2-BD59-A6C34878D82A}">
-                    <a16:rowId xmlns:a16="http://schemas.microsoft.com/office/drawing/2014/main" val="10001"/>
-                  </a:ext>
-                </a:extLst>
-              </a:tr>
-            </a:tbl>
-          </a:graphicData>
-        </a:graphic>
-      </p:graphicFrame>
-      <p:graphicFrame>
-        <p:nvGraphicFramePr>
-          <p:cNvPr id="6" name="Table 5"/>
-          <p:cNvGraphicFramePr>
-            <a:graphicFrameLocks noGrp="1"/>
-          </p:cNvGraphicFramePr>
-          <p:nvPr/>
-        </p:nvGraphicFramePr>
-        <p:xfrm>
-          <a:off x="990600" y="3124200"/>
-          <a:ext cx="7459980" cy="3138141"/>
-        </p:xfrm>
-        <a:graphic>
-          <a:graphicData uri="http://schemas.openxmlformats.org/drawingml/2006/table">
-            <a:tbl>
-              <a:tblPr firstRow="1" bandRow="1">
-                <a:tableStyleId>{5C22544A-7EE6-4342-B048-85BDC9FD1C3A}</a:tableStyleId>
-              </a:tblPr>
-              <a:tblGrid>
-                <a:gridCol w="3505200">
-                  <a:extLst>
-                    <a:ext uri="{9D8B030D-6E8A-4147-A177-3AD203B41FA5}">
-                      <a16:colId xmlns:a16="http://schemas.microsoft.com/office/drawing/2014/main" val="20000"/>
-                    </a:ext>
-                  </a:extLst>
-                </a:gridCol>
-                <a:gridCol w="3954780">
-                  <a:extLst>
-                    <a:ext uri="{9D8B030D-6E8A-4147-A177-3AD203B41FA5}">
-                      <a16:colId xmlns:a16="http://schemas.microsoft.com/office/drawing/2014/main" val="20001"/>
-                    </a:ext>
-                  </a:extLst>
-                </a:gridCol>
-              </a:tblGrid>
-              <a:tr h="229898">
-                <a:tc>
-                  <a:txBody>
-                    <a:bodyPr/>
-                    <a:lstStyle/>
-                    <a:p>
-                      <a:pPr marL="0" marR="0" algn="just">
-                        <a:spcBef>
-                          <a:spcPts val="0"/>
-                        </a:spcBef>
-                        <a:spcAft>
-                          <a:spcPts val="0"/>
-                        </a:spcAft>
-                      </a:pPr>
-                      <a:r>
-                        <a:rPr lang="en-US" sz="1600" dirty="0">
-                          <a:effectLst/>
-                          <a:latin typeface="Consolas" panose="020B0609020204030204" pitchFamily="49" charset="0"/>
-                          <a:cs typeface="Consolas" panose="020B0609020204030204" pitchFamily="49" charset="0"/>
-                        </a:rPr>
-                        <a:t>C Program</a:t>
-                      </a:r>
-                      <a:endParaRPr lang="en-US" sz="1600" dirty="0">
-                        <a:effectLst/>
-                        <a:latin typeface="Consolas" panose="020B0609020204030204" pitchFamily="49" charset="0"/>
-                        <a:ea typeface="宋体" panose="02010600030101010101" pitchFamily="2" charset="-122"/>
-                        <a:cs typeface="Consolas" panose="020B0609020204030204" pitchFamily="49" charset="0"/>
-                      </a:endParaRPr>
-                    </a:p>
-                  </a:txBody>
-                  <a:tcPr marL="68580" marR="68580" marT="0" marB="0"/>
-                </a:tc>
-                <a:tc>
-                  <a:txBody>
-                    <a:bodyPr/>
-                    <a:lstStyle/>
-                    <a:p>
-                      <a:pPr marL="0" marR="0" algn="just">
-                        <a:spcBef>
-                          <a:spcPts val="0"/>
-                        </a:spcBef>
-                        <a:spcAft>
-                          <a:spcPts val="0"/>
-                        </a:spcAft>
-                      </a:pPr>
-                      <a:r>
-                        <a:rPr lang="en-US" sz="1600">
-                          <a:effectLst/>
-                          <a:latin typeface="Consolas" panose="020B0609020204030204" pitchFamily="49" charset="0"/>
-                          <a:cs typeface="Consolas" panose="020B0609020204030204" pitchFamily="49" charset="0"/>
-                        </a:rPr>
-                        <a:t>Assembly Program</a:t>
-                      </a:r>
-                      <a:endParaRPr lang="en-US" sz="1600">
-                        <a:effectLst/>
-                        <a:latin typeface="Consolas" panose="020B0609020204030204" pitchFamily="49" charset="0"/>
-                        <a:ea typeface="宋体" panose="02010600030101010101" pitchFamily="2" charset="-122"/>
-                        <a:cs typeface="Consolas" panose="020B0609020204030204" pitchFamily="49" charset="0"/>
-                      </a:endParaRPr>
-                    </a:p>
-                  </a:txBody>
-                  <a:tcPr marL="68580" marR="68580" marT="0" marB="0"/>
-                </a:tc>
-                <a:extLst>
-                  <a:ext uri="{0D108BD9-81ED-4DB2-BD59-A6C34878D82A}">
-                    <a16:rowId xmlns:a16="http://schemas.microsoft.com/office/drawing/2014/main" val="10000"/>
-                  </a:ext>
-                </a:extLst>
-              </a:tr>
-              <a:tr h="2894301">
-                <a:tc>
-                  <a:txBody>
-                    <a:bodyPr/>
-                    <a:lstStyle/>
-                    <a:p>
-                      <a:pPr marL="0" marR="0" algn="just">
-                        <a:spcBef>
-                          <a:spcPts val="300"/>
-                        </a:spcBef>
-                        <a:spcAft>
-                          <a:spcPts val="0"/>
-                        </a:spcAft>
-                      </a:pPr>
-                      <a:r>
-                        <a:rPr lang="en-US" sz="1600">
-                          <a:effectLst/>
-                          <a:latin typeface="Consolas" panose="020B0609020204030204" pitchFamily="49" charset="0"/>
-                          <a:cs typeface="Consolas" panose="020B0609020204030204" pitchFamily="49" charset="0"/>
-                        </a:rPr>
-                        <a:t>float max(float a, float b){</a:t>
-                      </a:r>
-                    </a:p>
-                    <a:p>
-                      <a:pPr marL="0" marR="0" algn="just">
-                        <a:spcBef>
-                          <a:spcPts val="0"/>
-                        </a:spcBef>
-                        <a:spcAft>
-                          <a:spcPts val="0"/>
-                        </a:spcAft>
-                      </a:pPr>
-                      <a:r>
-                        <a:rPr lang="en-US" sz="1600">
-                          <a:effectLst/>
-                          <a:latin typeface="Consolas" panose="020B0609020204030204" pitchFamily="49" charset="0"/>
-                          <a:cs typeface="Consolas" panose="020B0609020204030204" pitchFamily="49" charset="0"/>
-                        </a:rPr>
-                        <a:t>  if (a &gt; b)</a:t>
-                      </a:r>
-                    </a:p>
-                    <a:p>
-                      <a:pPr marL="0" marR="0" algn="just">
-                        <a:spcBef>
-                          <a:spcPts val="0"/>
-                        </a:spcBef>
-                        <a:spcAft>
-                          <a:spcPts val="0"/>
-                        </a:spcAft>
-                      </a:pPr>
-                      <a:r>
-                        <a:rPr lang="en-US" sz="1600">
-                          <a:effectLst/>
-                          <a:latin typeface="Consolas" panose="020B0609020204030204" pitchFamily="49" charset="0"/>
-                          <a:cs typeface="Consolas" panose="020B0609020204030204" pitchFamily="49" charset="0"/>
-                        </a:rPr>
-                        <a:t>    return a;</a:t>
-                      </a:r>
-                    </a:p>
-                    <a:p>
-                      <a:pPr marL="0" marR="0" algn="just">
-                        <a:spcBef>
-                          <a:spcPts val="0"/>
-                        </a:spcBef>
-                        <a:spcAft>
-                          <a:spcPts val="0"/>
-                        </a:spcAft>
-                      </a:pPr>
-                      <a:r>
-                        <a:rPr lang="en-US" sz="1600">
-                          <a:effectLst/>
-                          <a:latin typeface="Consolas" panose="020B0609020204030204" pitchFamily="49" charset="0"/>
-                          <a:cs typeface="Consolas" panose="020B0609020204030204" pitchFamily="49" charset="0"/>
-                        </a:rPr>
-                        <a:t>  else</a:t>
-                      </a:r>
-                    </a:p>
-                    <a:p>
-                      <a:pPr marL="0" marR="0" algn="just">
-                        <a:spcBef>
-                          <a:spcPts val="0"/>
-                        </a:spcBef>
-                        <a:spcAft>
-                          <a:spcPts val="0"/>
-                        </a:spcAft>
-                      </a:pPr>
-                      <a:r>
-                        <a:rPr lang="en-US" sz="1600">
-                          <a:effectLst/>
-                          <a:latin typeface="Consolas" panose="020B0609020204030204" pitchFamily="49" charset="0"/>
-                          <a:cs typeface="Consolas" panose="020B0609020204030204" pitchFamily="49" charset="0"/>
-                        </a:rPr>
-                        <a:t>    return b;</a:t>
-                      </a:r>
-                    </a:p>
-                    <a:p>
-                      <a:pPr marL="0" marR="0" algn="just">
-                        <a:spcBef>
-                          <a:spcPts val="0"/>
-                        </a:spcBef>
-                        <a:spcAft>
-                          <a:spcPts val="0"/>
-                        </a:spcAft>
-                      </a:pPr>
-                      <a:r>
-                        <a:rPr lang="en-US" sz="1600">
-                          <a:effectLst/>
-                          <a:latin typeface="Consolas" panose="020B0609020204030204" pitchFamily="49" charset="0"/>
-                          <a:cs typeface="Consolas" panose="020B0609020204030204" pitchFamily="49" charset="0"/>
-                        </a:rPr>
-                        <a:t>}</a:t>
-                      </a:r>
-                      <a:endParaRPr lang="en-US" sz="1600">
-                        <a:effectLst/>
-                        <a:latin typeface="Consolas" panose="020B0609020204030204" pitchFamily="49" charset="0"/>
-                        <a:ea typeface="宋体" panose="02010600030101010101" pitchFamily="2" charset="-122"/>
-                        <a:cs typeface="Consolas" panose="020B0609020204030204" pitchFamily="49" charset="0"/>
-                      </a:endParaRPr>
-                    </a:p>
-                  </a:txBody>
-                  <a:tcPr marL="68580" marR="68580" marT="0" marB="0"/>
-                </a:tc>
-                <a:tc>
-                  <a:txBody>
-                    <a:bodyPr/>
-                    <a:lstStyle/>
-                    <a:p>
-                      <a:pPr marL="0" marR="0" algn="just">
-                        <a:spcBef>
-                          <a:spcPts val="300"/>
-                        </a:spcBef>
-                        <a:spcAft>
-                          <a:spcPts val="0"/>
-                        </a:spcAft>
-                      </a:pPr>
-                      <a:r>
-                        <a:rPr lang="en-US" sz="1600" dirty="0" err="1">
-                          <a:effectLst/>
-                          <a:latin typeface="Consolas" panose="020B0609020204030204" pitchFamily="49" charset="0"/>
-                          <a:cs typeface="Consolas" panose="020B0609020204030204" pitchFamily="49" charset="0"/>
-                        </a:rPr>
-                        <a:t>max_of_two</a:t>
-                      </a:r>
-                      <a:r>
-                        <a:rPr lang="en-US" sz="1600" dirty="0">
-                          <a:effectLst/>
-                          <a:latin typeface="Consolas" panose="020B0609020204030204" pitchFamily="49" charset="0"/>
-                          <a:cs typeface="Consolas" panose="020B0609020204030204" pitchFamily="49" charset="0"/>
-                        </a:rPr>
-                        <a:t> PROC</a:t>
-                      </a:r>
-                    </a:p>
-                    <a:p>
-                      <a:pPr marL="0" marR="0" algn="just">
-                        <a:spcBef>
-                          <a:spcPts val="0"/>
-                        </a:spcBef>
-                        <a:spcAft>
-                          <a:spcPts val="0"/>
-                        </a:spcAft>
-                      </a:pPr>
-                      <a:r>
-                        <a:rPr lang="en-US" sz="1600" dirty="0">
-                          <a:effectLst/>
-                          <a:latin typeface="Consolas" panose="020B0609020204030204" pitchFamily="49" charset="0"/>
-                          <a:cs typeface="Consolas" panose="020B0609020204030204" pitchFamily="49" charset="0"/>
-                        </a:rPr>
-                        <a:t>      VCMPE.F32 s0, s1</a:t>
-                      </a:r>
-                    </a:p>
-                    <a:p>
-                      <a:pPr marL="0" marR="0" algn="just">
-                        <a:spcBef>
-                          <a:spcPts val="0"/>
-                        </a:spcBef>
-                        <a:spcAft>
-                          <a:spcPts val="0"/>
-                        </a:spcAft>
-                      </a:pPr>
-                      <a:endParaRPr lang="en-US" sz="1600" dirty="0">
-                        <a:effectLst/>
-                        <a:latin typeface="Consolas" panose="020B0609020204030204" pitchFamily="49" charset="0"/>
-                        <a:cs typeface="Consolas" panose="020B0609020204030204" pitchFamily="49" charset="0"/>
-                      </a:endParaRPr>
-                    </a:p>
-                    <a:p>
-                      <a:pPr marL="0" marR="0" algn="just">
-                        <a:spcBef>
-                          <a:spcPts val="0"/>
-                        </a:spcBef>
-                        <a:spcAft>
-                          <a:spcPts val="0"/>
-                        </a:spcAft>
-                      </a:pPr>
-                      <a:r>
-                        <a:rPr lang="en-US" sz="1600" dirty="0">
-                          <a:effectLst/>
-                          <a:latin typeface="Consolas" panose="020B0609020204030204" pitchFamily="49" charset="0"/>
-                          <a:cs typeface="Consolas" panose="020B0609020204030204" pitchFamily="49" charset="0"/>
-                        </a:rPr>
-                        <a:t>      ; Copy NZCV flags to APSR</a:t>
-                      </a:r>
-                    </a:p>
-                    <a:p>
-                      <a:pPr marL="0" marR="0" algn="just">
-                        <a:spcBef>
-                          <a:spcPts val="0"/>
-                        </a:spcBef>
-                        <a:spcAft>
-                          <a:spcPts val="0"/>
-                        </a:spcAft>
-                      </a:pPr>
-                      <a:r>
-                        <a:rPr lang="en-US" sz="1600" dirty="0">
-                          <a:effectLst/>
-                          <a:latin typeface="Consolas" panose="020B0609020204030204" pitchFamily="49" charset="0"/>
-                          <a:cs typeface="Consolas" panose="020B0609020204030204" pitchFamily="49" charset="0"/>
-                        </a:rPr>
-                        <a:t>      VMRS      </a:t>
-                      </a:r>
-                      <a:r>
-                        <a:rPr lang="en-US" sz="1600" dirty="0" err="1">
-                          <a:effectLst/>
-                          <a:latin typeface="Consolas" panose="020B0609020204030204" pitchFamily="49" charset="0"/>
-                          <a:cs typeface="Consolas" panose="020B0609020204030204" pitchFamily="49" charset="0"/>
-                        </a:rPr>
-                        <a:t>APSR_nzcv</a:t>
-                      </a:r>
-                      <a:r>
-                        <a:rPr lang="en-US" sz="1600" dirty="0">
-                          <a:effectLst/>
-                          <a:latin typeface="Consolas" panose="020B0609020204030204" pitchFamily="49" charset="0"/>
-                          <a:cs typeface="Consolas" panose="020B0609020204030204" pitchFamily="49" charset="0"/>
-                        </a:rPr>
-                        <a:t>, FPSCR</a:t>
-                      </a:r>
-                    </a:p>
-                    <a:p>
-                      <a:pPr marL="0" marR="0" algn="just">
-                        <a:spcBef>
-                          <a:spcPts val="0"/>
-                        </a:spcBef>
-                        <a:spcAft>
-                          <a:spcPts val="0"/>
-                        </a:spcAft>
-                      </a:pPr>
-                      <a:endParaRPr lang="en-US" sz="1600" dirty="0">
-                        <a:effectLst/>
-                        <a:latin typeface="Consolas" panose="020B0609020204030204" pitchFamily="49" charset="0"/>
-                        <a:cs typeface="Consolas" panose="020B0609020204030204" pitchFamily="49" charset="0"/>
-                      </a:endParaRPr>
-                    </a:p>
-                    <a:p>
-                      <a:pPr marL="0" marR="0" algn="just">
-                        <a:spcBef>
-                          <a:spcPts val="0"/>
-                        </a:spcBef>
-                        <a:spcAft>
-                          <a:spcPts val="0"/>
-                        </a:spcAft>
-                      </a:pPr>
-                      <a:r>
-                        <a:rPr lang="en-US" sz="1600" dirty="0">
-                          <a:effectLst/>
-                          <a:latin typeface="Consolas" panose="020B0609020204030204" pitchFamily="49" charset="0"/>
-                          <a:cs typeface="Consolas" panose="020B0609020204030204" pitchFamily="49" charset="0"/>
-                        </a:rPr>
-                        <a:t>      BGT       exit</a:t>
-                      </a:r>
-                    </a:p>
-                    <a:p>
-                      <a:pPr marL="0" marR="0" algn="just">
-                        <a:spcBef>
-                          <a:spcPts val="0"/>
-                        </a:spcBef>
-                        <a:spcAft>
-                          <a:spcPts val="0"/>
-                        </a:spcAft>
-                      </a:pPr>
-                      <a:r>
-                        <a:rPr lang="en-US" sz="1600" dirty="0">
-                          <a:effectLst/>
-                          <a:latin typeface="Consolas" panose="020B0609020204030204" pitchFamily="49" charset="0"/>
-                          <a:cs typeface="Consolas" panose="020B0609020204030204" pitchFamily="49" charset="0"/>
-                        </a:rPr>
-                        <a:t>      VMOV.F32  s0, s1</a:t>
-                      </a:r>
-                    </a:p>
-                    <a:p>
-                      <a:pPr marL="0" marR="0" algn="just">
-                        <a:spcBef>
-                          <a:spcPts val="0"/>
-                        </a:spcBef>
-                        <a:spcAft>
-                          <a:spcPts val="0"/>
-                        </a:spcAft>
-                      </a:pPr>
-                      <a:endParaRPr lang="en-US" sz="1600" dirty="0">
-                        <a:effectLst/>
-                        <a:latin typeface="Consolas" panose="020B0609020204030204" pitchFamily="49" charset="0"/>
-                        <a:cs typeface="Consolas" panose="020B0609020204030204" pitchFamily="49" charset="0"/>
-                      </a:endParaRPr>
-                    </a:p>
-                    <a:p>
-                      <a:pPr marL="0" marR="0" algn="just">
-                        <a:spcBef>
-                          <a:spcPts val="0"/>
-                        </a:spcBef>
-                        <a:spcAft>
-                          <a:spcPts val="0"/>
-                        </a:spcAft>
-                      </a:pPr>
-                      <a:r>
-                        <a:rPr lang="en-US" sz="1600" dirty="0">
-                          <a:effectLst/>
-                          <a:latin typeface="Consolas" panose="020B0609020204030204" pitchFamily="49" charset="0"/>
-                          <a:cs typeface="Consolas" panose="020B0609020204030204" pitchFamily="49" charset="0"/>
-                        </a:rPr>
-                        <a:t>exit  BX LR</a:t>
-                      </a:r>
-                    </a:p>
-                    <a:p>
-                      <a:pPr marL="0" marR="0" algn="just">
-                        <a:spcBef>
-                          <a:spcPts val="0"/>
-                        </a:spcBef>
-                        <a:spcAft>
-                          <a:spcPts val="300"/>
-                        </a:spcAft>
-                      </a:pPr>
-                      <a:r>
-                        <a:rPr lang="en-US" sz="1600" dirty="0">
-                          <a:effectLst/>
-                          <a:latin typeface="Consolas" panose="020B0609020204030204" pitchFamily="49" charset="0"/>
-                          <a:cs typeface="Consolas" panose="020B0609020204030204" pitchFamily="49" charset="0"/>
-                        </a:rPr>
-                        <a:t>      ENDP</a:t>
-                      </a:r>
-                      <a:endParaRPr lang="en-US" sz="1600" dirty="0">
-                        <a:effectLst/>
-                        <a:latin typeface="Consolas" panose="020B0609020204030204" pitchFamily="49" charset="0"/>
-                        <a:ea typeface="宋体" panose="02010600030101010101" pitchFamily="2" charset="-122"/>
-                        <a:cs typeface="Consolas" panose="020B0609020204030204" pitchFamily="49" charset="0"/>
-                      </a:endParaRPr>
-                    </a:p>
-                  </a:txBody>
-                  <a:tcPr marL="68580" marR="68580" marT="0" marB="0"/>
-                </a:tc>
-                <a:extLst>
-                  <a:ext uri="{0D108BD9-81ED-4DB2-BD59-A6C34878D82A}">
-                    <a16:rowId xmlns:a16="http://schemas.microsoft.com/office/drawing/2014/main" val="10001"/>
-                  </a:ext>
-                </a:extLst>
-              </a:tr>
-            </a:tbl>
-          </a:graphicData>
-        </a:graphic>
-      </p:graphicFrame>
-    </p:spTree>
-    <p:extLst>
-      <p:ext uri="{BB962C8B-B14F-4D97-AF65-F5344CB8AC3E}">
-        <p14:creationId xmlns:p14="http://schemas.microsoft.com/office/powerpoint/2010/main" val="3866271372"/>
-      </p:ext>
-    </p:extLst>
-  </p:cSld>
-  <p:clrMapOvr>
-    <a:masterClrMapping/>
-  </p:clrMapOvr>
-</p:sld>
-</file>
-
-<file path=ppt/slides/slide22.xml><?xml version="1.0" encoding="utf-8"?>
-<p:sld xmlns:a="http://schemas.openxmlformats.org/drawingml/2006/main" xmlns:r="http://schemas.openxmlformats.org/officeDocument/2006/relationships" xmlns:p="http://schemas.openxmlformats.org/presentationml/2006/main">
-  <p:cSld>
-    <p:spTree>
-      <p:nvGrpSpPr>
-        <p:cNvPr id="1" name=""/>
-        <p:cNvGrpSpPr/>
-        <p:nvPr/>
-      </p:nvGrpSpPr>
-      <p:grpSpPr>
-        <a:xfrm>
-          <a:off x="0" y="0"/>
-          <a:ext cx="0" cy="0"/>
-          <a:chOff x="0" y="0"/>
-          <a:chExt cx="0" cy="0"/>
-        </a:xfrm>
-      </p:grpSpPr>
-      <p:sp>
-        <p:nvSpPr>
-          <p:cNvPr id="2" name="Title 1"/>
-          <p:cNvSpPr>
-            <a:spLocks noGrp="1"/>
-          </p:cNvSpPr>
-          <p:nvPr>
-            <p:ph type="title"/>
-          </p:nvPr>
-        </p:nvSpPr>
-        <p:spPr/>
-        <p:txBody>
-          <a:bodyPr/>
-          <a:lstStyle/>
-          <a:p>
-            <a:r>
-              <a:rPr lang="en-US" dirty="0"/>
-              <a:t>Lab Components</a:t>
-            </a:r>
-          </a:p>
-        </p:txBody>
-      </p:sp>
-      <p:sp>
-        <p:nvSpPr>
-          <p:cNvPr id="3" name="Content Placeholder 2"/>
-          <p:cNvSpPr>
-            <a:spLocks noGrp="1"/>
-          </p:cNvSpPr>
-          <p:nvPr>
-            <p:ph sz="quarter" idx="1"/>
-          </p:nvPr>
-        </p:nvSpPr>
-        <p:spPr/>
-        <p:txBody>
-          <a:bodyPr>
-            <a:normAutofit fontScale="85000" lnSpcReduction="20000"/>
-          </a:bodyPr>
-          <a:lstStyle/>
-          <a:p>
-            <a:r>
-              <a:rPr lang="en-US" dirty="0"/>
-              <a:t>GPIO Input, Output, Alternative Function</a:t>
-            </a:r>
-          </a:p>
-          <a:p>
-            <a:pPr lvl="1"/>
-            <a:r>
-              <a:rPr lang="en-US" dirty="0"/>
-              <a:t>Push pull, open drain, pull up, pull down</a:t>
-            </a:r>
-          </a:p>
-          <a:p>
-            <a:r>
-              <a:rPr lang="en-US" dirty="0"/>
-              <a:t>Timer Configuration (PSC, ARR, CCR)</a:t>
-            </a:r>
-          </a:p>
-          <a:p>
-            <a:pPr lvl="1"/>
-            <a:r>
-              <a:rPr lang="en-US" dirty="0"/>
-              <a:t>Compare output</a:t>
-            </a:r>
-          </a:p>
-          <a:p>
-            <a:pPr lvl="1"/>
-            <a:r>
-              <a:rPr lang="en-US" dirty="0"/>
-              <a:t>Input capture</a:t>
-            </a:r>
-          </a:p>
-          <a:p>
-            <a:pPr lvl="1"/>
-            <a:r>
-              <a:rPr lang="en-US" dirty="0"/>
-              <a:t>PWM output: Duty Ratio</a:t>
-            </a:r>
-          </a:p>
-          <a:p>
-            <a:pPr lvl="1"/>
-            <a:r>
-              <a:rPr lang="en-US" dirty="0"/>
-              <a:t>Trigger</a:t>
-            </a:r>
-          </a:p>
-          <a:p>
-            <a:r>
-              <a:rPr lang="en-US" dirty="0"/>
-              <a:t>System Timer</a:t>
-            </a:r>
-          </a:p>
-          <a:p>
-            <a:pPr lvl="1"/>
-            <a:r>
-              <a:rPr lang="en-US" dirty="0"/>
-              <a:t>Processor clock</a:t>
-            </a:r>
-          </a:p>
-          <a:p>
-            <a:pPr lvl="1"/>
-            <a:r>
-              <a:rPr lang="en-US" dirty="0"/>
-              <a:t>External clock: Processor clock/8</a:t>
-            </a:r>
-          </a:p>
-          <a:p>
-            <a:r>
-              <a:rPr lang="en-US" dirty="0"/>
-              <a:t>ADC &amp; DAC</a:t>
-            </a:r>
-          </a:p>
-          <a:p>
-            <a:pPr lvl="1"/>
-            <a:r>
-              <a:rPr lang="en-US" dirty="0"/>
-              <a:t>Successive-approximation (SAR) ADC</a:t>
-            </a:r>
-          </a:p>
-          <a:p>
-            <a:pPr lvl="1"/>
-            <a:r>
-              <a:rPr lang="en-US" dirty="0"/>
-              <a:t>Resolution, Speed</a:t>
-            </a:r>
-          </a:p>
-          <a:p>
-            <a:r>
-              <a:rPr lang="en-US" dirty="0"/>
-              <a:t>Step motors</a:t>
-            </a:r>
-          </a:p>
-          <a:p>
-            <a:pPr lvl="1"/>
-            <a:r>
-              <a:rPr lang="en-US" dirty="0"/>
-              <a:t>Full stepping, half stepping</a:t>
-            </a:r>
-          </a:p>
-        </p:txBody>
-      </p:sp>
-      <p:sp>
-        <p:nvSpPr>
-          <p:cNvPr id="4" name="Slide Number Placeholder 3"/>
-          <p:cNvSpPr>
-            <a:spLocks noGrp="1"/>
-          </p:cNvSpPr>
-          <p:nvPr>
-            <p:ph type="sldNum" sz="quarter" idx="12"/>
-          </p:nvPr>
-        </p:nvSpPr>
-        <p:spPr/>
-        <p:txBody>
-          <a:bodyPr/>
-          <a:lstStyle/>
-          <a:p>
-            <a:pPr eaLnBrk="1" latinLnBrk="0" hangingPunct="1"/>
-            <a:fld id="{EA7C8D44-3667-46F6-9772-CC52308E2A7F}" type="slidenum">
-              <a:rPr kumimoji="0" lang="en-US" smtClean="0"/>
-              <a:pPr eaLnBrk="1" latinLnBrk="0" hangingPunct="1"/>
-              <a:t>22</a:t>
-            </a:fld>
-            <a:endParaRPr kumimoji="0" lang="en-US" dirty="0"/>
-          </a:p>
-        </p:txBody>
-      </p:sp>
-    </p:spTree>
-    <p:extLst>
-      <p:ext uri="{BB962C8B-B14F-4D97-AF65-F5344CB8AC3E}">
-        <p14:creationId xmlns:p14="http://schemas.microsoft.com/office/powerpoint/2010/main" val="3901081122"/>
-      </p:ext>
-    </p:extLst>
-  </p:cSld>
-  <p:clrMapOvr>
-    <a:masterClrMapping/>
-  </p:clrMapOvr>
-</p:sld>
-</file>
-
-<file path=ppt/slides/slide23.xml><?xml version="1.0" encoding="utf-8"?>
-<p:sld xmlns:a="http://schemas.openxmlformats.org/drawingml/2006/main" xmlns:r="http://schemas.openxmlformats.org/officeDocument/2006/relationships" xmlns:p="http://schemas.openxmlformats.org/presentationml/2006/main">
-  <p:cSld>
-    <p:spTree>
-      <p:nvGrpSpPr>
-        <p:cNvPr id="1" name=""/>
-        <p:cNvGrpSpPr/>
-        <p:nvPr/>
-      </p:nvGrpSpPr>
-      <p:grpSpPr>
-        <a:xfrm>
-          <a:off x="0" y="0"/>
-          <a:ext cx="0" cy="0"/>
-          <a:chOff x="0" y="0"/>
-          <a:chExt cx="0" cy="0"/>
-        </a:xfrm>
-      </p:grpSpPr>
-      <p:sp>
-        <p:nvSpPr>
-          <p:cNvPr id="2" name="Title 1"/>
-          <p:cNvSpPr>
-            <a:spLocks noGrp="1"/>
-          </p:cNvSpPr>
-          <p:nvPr>
-            <p:ph type="title"/>
-          </p:nvPr>
-        </p:nvSpPr>
-        <p:spPr/>
-        <p:txBody>
-          <a:bodyPr>
-            <a:normAutofit fontScale="90000"/>
-          </a:bodyPr>
-          <a:lstStyle/>
-          <a:p>
-            <a:r>
-              <a:rPr lang="en-US" dirty="0" err="1"/>
-              <a:t>GPIO</a:t>
-            </a:r>
-            <a:r>
-              <a:rPr lang="en-US" dirty="0"/>
-              <a:t> Input: </a:t>
-            </a:r>
-            <a:br>
-              <a:rPr lang="en-US" dirty="0"/>
-            </a:br>
-            <a:r>
-              <a:rPr lang="en-US" dirty="0"/>
-              <a:t>Pull Up and Pull Down</a:t>
-            </a:r>
-          </a:p>
-        </p:txBody>
-      </p:sp>
-      <p:sp>
-        <p:nvSpPr>
-          <p:cNvPr id="3" name="Slide Number Placeholder 2"/>
-          <p:cNvSpPr>
-            <a:spLocks noGrp="1"/>
-          </p:cNvSpPr>
-          <p:nvPr>
-            <p:ph type="sldNum" sz="quarter" idx="12"/>
-          </p:nvPr>
-        </p:nvSpPr>
-        <p:spPr/>
-        <p:txBody>
-          <a:bodyPr/>
-          <a:lstStyle/>
-          <a:p>
-            <a:fld id="{EA7C8D44-3667-46F6-9772-CC52308E2A7F}" type="slidenum">
-              <a:rPr kumimoji="0" lang="en-US" smtClean="0"/>
-              <a:pPr/>
-              <a:t>23</a:t>
-            </a:fld>
-            <a:endParaRPr kumimoji="0" lang="en-US" dirty="0"/>
-          </a:p>
-        </p:txBody>
-      </p:sp>
-      <p:sp>
-        <p:nvSpPr>
-          <p:cNvPr id="6" name="Content Placeholder 5"/>
-          <p:cNvSpPr>
-            <a:spLocks noGrp="1"/>
-          </p:cNvSpPr>
-          <p:nvPr>
-            <p:ph sz="quarter" idx="1"/>
-          </p:nvPr>
-        </p:nvSpPr>
-        <p:spPr/>
-        <p:txBody>
-          <a:bodyPr/>
-          <a:lstStyle/>
-          <a:p>
-            <a:r>
-              <a:rPr lang="en-US" dirty="0"/>
-              <a:t>A digital input can have three states: High, Low, and High-Impedance (also called floating, tri-stated, </a:t>
-            </a:r>
-            <a:r>
-              <a:rPr lang="en-US" dirty="0" err="1"/>
-              <a:t>HiZ</a:t>
-            </a:r>
-            <a:r>
-              <a:rPr lang="en-US" dirty="0"/>
-              <a:t>)</a:t>
-            </a:r>
-          </a:p>
-        </p:txBody>
-      </p:sp>
-      <p:pic>
-        <p:nvPicPr>
-          <p:cNvPr id="1030" name="Picture 6"/>
-          <p:cNvPicPr>
-            <a:picLocks noChangeAspect="1" noChangeArrowheads="1"/>
-          </p:cNvPicPr>
-          <p:nvPr/>
-        </p:nvPicPr>
-        <p:blipFill>
-          <a:blip r:embed="rId2" cstate="print">
-            <a:extLst>
-              <a:ext uri="{28A0092B-C50C-407E-A947-70E740481C1C}">
-                <a14:useLocalDpi xmlns:a14="http://schemas.microsoft.com/office/drawing/2010/main" val="0"/>
-              </a:ext>
-            </a:extLst>
-          </a:blip>
-          <a:srcRect/>
-          <a:stretch>
-            <a:fillRect/>
-          </a:stretch>
-        </p:blipFill>
-        <p:spPr bwMode="auto">
-          <a:xfrm>
-            <a:off x="5334000" y="2286000"/>
-            <a:ext cx="2895600" cy="3068809"/>
-          </a:xfrm>
-          <a:prstGeom prst="rect">
-            <a:avLst/>
-          </a:prstGeom>
-          <a:noFill/>
-          <a:ln>
-            <a:noFill/>
-          </a:ln>
-          <a:extLst>
-            <a:ext uri="{909E8E84-426E-40DD-AFC4-6F175D3DCCD1}">
-              <a14:hiddenFill xmlns:a14="http://schemas.microsoft.com/office/drawing/2010/main">
-                <a:solidFill>
-                  <a:schemeClr val="accent1"/>
-                </a:solidFill>
-              </a14:hiddenFill>
-            </a:ext>
-            <a:ext uri="{91240B29-F687-4F45-9708-019B960494DF}">
-              <a14:hiddenLine xmlns:a14="http://schemas.microsoft.com/office/drawing/2010/main" w="9525">
-                <a:solidFill>
-                  <a:schemeClr val="tx1"/>
-                </a:solidFill>
-                <a:miter lim="800000"/>
-                <a:headEnd/>
-                <a:tailEnd/>
-              </a14:hiddenLine>
-            </a:ext>
-          </a:extLst>
-        </p:spPr>
-      </p:pic>
-      <p:pic>
-        <p:nvPicPr>
-          <p:cNvPr id="1031" name="Picture 7"/>
-          <p:cNvPicPr>
-            <a:picLocks noChangeAspect="1" noChangeArrowheads="1"/>
-          </p:cNvPicPr>
-          <p:nvPr/>
-        </p:nvPicPr>
-        <p:blipFill>
-          <a:blip r:embed="rId3" cstate="print">
-            <a:extLst>
-              <a:ext uri="{28A0092B-C50C-407E-A947-70E740481C1C}">
-                <a14:useLocalDpi xmlns:a14="http://schemas.microsoft.com/office/drawing/2010/main" val="0"/>
-              </a:ext>
-            </a:extLst>
-          </a:blip>
-          <a:srcRect/>
-          <a:stretch>
-            <a:fillRect/>
-          </a:stretch>
-        </p:blipFill>
-        <p:spPr bwMode="auto">
-          <a:xfrm>
-            <a:off x="1237080" y="2334647"/>
-            <a:ext cx="2895600" cy="2954997"/>
-          </a:xfrm>
-          <a:prstGeom prst="rect">
-            <a:avLst/>
-          </a:prstGeom>
-          <a:noFill/>
-          <a:ln>
-            <a:noFill/>
-          </a:ln>
-          <a:extLst>
-            <a:ext uri="{909E8E84-426E-40DD-AFC4-6F175D3DCCD1}">
-              <a14:hiddenFill xmlns:a14="http://schemas.microsoft.com/office/drawing/2010/main">
-                <a:solidFill>
-                  <a:schemeClr val="accent1"/>
-                </a:solidFill>
-              </a14:hiddenFill>
-            </a:ext>
-            <a:ext uri="{91240B29-F687-4F45-9708-019B960494DF}">
-              <a14:hiddenLine xmlns:a14="http://schemas.microsoft.com/office/drawing/2010/main" w="9525">
-                <a:solidFill>
-                  <a:schemeClr val="tx1"/>
-                </a:solidFill>
-                <a:miter lim="800000"/>
-                <a:headEnd/>
-                <a:tailEnd/>
-              </a14:hiddenLine>
-            </a:ext>
-          </a:extLst>
-        </p:spPr>
-      </p:pic>
-      <p:sp>
-        <p:nvSpPr>
-          <p:cNvPr id="7" name="TextBox 6"/>
-          <p:cNvSpPr txBox="1"/>
-          <p:nvPr/>
-        </p:nvSpPr>
-        <p:spPr>
-          <a:xfrm>
-            <a:off x="1810923" y="5300135"/>
-            <a:ext cx="873957" cy="369332"/>
-          </a:xfrm>
-          <a:prstGeom prst="rect">
-            <a:avLst/>
-          </a:prstGeom>
-          <a:noFill/>
-        </p:spPr>
-        <p:txBody>
-          <a:bodyPr wrap="none" rtlCol="0">
-            <a:spAutoFit/>
-          </a:bodyPr>
-          <a:lstStyle/>
-          <a:p>
-            <a:r>
-              <a:rPr lang="en-US" dirty="0"/>
-              <a:t>Pull-Up</a:t>
-            </a:r>
-          </a:p>
-        </p:txBody>
-      </p:sp>
-      <p:sp>
-        <p:nvSpPr>
-          <p:cNvPr id="14" name="TextBox 13"/>
-          <p:cNvSpPr txBox="1"/>
-          <p:nvPr/>
-        </p:nvSpPr>
-        <p:spPr>
-          <a:xfrm>
-            <a:off x="6019800" y="5297904"/>
-            <a:ext cx="1174681" cy="369332"/>
-          </a:xfrm>
-          <a:prstGeom prst="rect">
-            <a:avLst/>
-          </a:prstGeom>
-          <a:noFill/>
-        </p:spPr>
-        <p:txBody>
-          <a:bodyPr wrap="none" rtlCol="0">
-            <a:spAutoFit/>
-          </a:bodyPr>
-          <a:lstStyle/>
-          <a:p>
-            <a:r>
-              <a:rPr lang="en-US" dirty="0"/>
-              <a:t>Pull-Down</a:t>
-            </a:r>
-          </a:p>
-        </p:txBody>
-      </p:sp>
-      <p:sp>
-        <p:nvSpPr>
-          <p:cNvPr id="8" name="TextBox 7"/>
-          <p:cNvSpPr txBox="1"/>
-          <p:nvPr/>
-        </p:nvSpPr>
-        <p:spPr>
-          <a:xfrm>
-            <a:off x="990600" y="5658976"/>
-            <a:ext cx="2989680" cy="646331"/>
-          </a:xfrm>
-          <a:prstGeom prst="rect">
-            <a:avLst/>
-          </a:prstGeom>
-          <a:noFill/>
-        </p:spPr>
-        <p:txBody>
-          <a:bodyPr wrap="square" rtlCol="0">
-            <a:spAutoFit/>
-          </a:bodyPr>
-          <a:lstStyle/>
-          <a:p>
-            <a:pPr algn="ctr"/>
-            <a:r>
-              <a:rPr lang="en-US" dirty="0"/>
-              <a:t>If external input is </a:t>
-            </a:r>
-            <a:r>
-              <a:rPr lang="en-US" dirty="0" err="1"/>
-              <a:t>HiZ</a:t>
-            </a:r>
-            <a:r>
-              <a:rPr lang="en-US" dirty="0"/>
-              <a:t>,  the input is read as a valid HIGH.</a:t>
-            </a:r>
-          </a:p>
-        </p:txBody>
-      </p:sp>
-      <p:sp>
-        <p:nvSpPr>
-          <p:cNvPr id="16" name="TextBox 15"/>
-          <p:cNvSpPr txBox="1"/>
-          <p:nvPr/>
-        </p:nvSpPr>
-        <p:spPr>
-          <a:xfrm>
-            <a:off x="5188500" y="5677727"/>
-            <a:ext cx="2837279" cy="646331"/>
-          </a:xfrm>
-          <a:prstGeom prst="rect">
-            <a:avLst/>
-          </a:prstGeom>
-          <a:noFill/>
-        </p:spPr>
-        <p:txBody>
-          <a:bodyPr wrap="square" rtlCol="0">
-            <a:spAutoFit/>
-          </a:bodyPr>
-          <a:lstStyle/>
-          <a:p>
-            <a:pPr algn="ctr"/>
-            <a:r>
-              <a:rPr lang="en-US" dirty="0"/>
-              <a:t>If external input is </a:t>
-            </a:r>
-            <a:r>
-              <a:rPr lang="en-US" dirty="0" err="1"/>
-              <a:t>HiZ</a:t>
-            </a:r>
-            <a:r>
-              <a:rPr lang="en-US" dirty="0"/>
-              <a:t>,  the input is read as a valid LOW.</a:t>
-            </a:r>
-          </a:p>
-        </p:txBody>
-      </p:sp>
-    </p:spTree>
-    <p:extLst>
-      <p:ext uri="{BB962C8B-B14F-4D97-AF65-F5344CB8AC3E}">
-        <p14:creationId xmlns:p14="http://schemas.microsoft.com/office/powerpoint/2010/main" val="3243208761"/>
-      </p:ext>
-    </p:extLst>
-  </p:cSld>
-  <p:clrMapOvr>
-    <a:masterClrMapping/>
-  </p:clrMapOvr>
-</p:sld>
-</file>
-
-<file path=ppt/slides/slide24.xml><?xml version="1.0" encoding="utf-8"?>
-<p:sld xmlns:a="http://schemas.openxmlformats.org/drawingml/2006/main" xmlns:r="http://schemas.openxmlformats.org/officeDocument/2006/relationships" xmlns:p="http://schemas.openxmlformats.org/presentationml/2006/main">
-  <p:cSld>
-    <p:spTree>
-      <p:nvGrpSpPr>
-        <p:cNvPr id="1" name=""/>
-        <p:cNvGrpSpPr/>
-        <p:nvPr/>
-      </p:nvGrpSpPr>
-      <p:grpSpPr>
-        <a:xfrm>
-          <a:off x="0" y="0"/>
-          <a:ext cx="0" cy="0"/>
-          <a:chOff x="0" y="0"/>
-          <a:chExt cx="0" cy="0"/>
-        </a:xfrm>
-      </p:grpSpPr>
-      <p:sp>
-        <p:nvSpPr>
-          <p:cNvPr id="2" name="Title 1"/>
-          <p:cNvSpPr>
-            <a:spLocks noGrp="1"/>
-          </p:cNvSpPr>
-          <p:nvPr>
-            <p:ph type="title"/>
-          </p:nvPr>
-        </p:nvSpPr>
-        <p:spPr/>
-        <p:txBody>
-          <a:bodyPr>
-            <a:normAutofit fontScale="90000"/>
-          </a:bodyPr>
-          <a:lstStyle/>
-          <a:p>
-            <a:r>
-              <a:rPr lang="en-US" dirty="0"/>
-              <a:t>GPIO Output Modes: </a:t>
-            </a:r>
-            <a:br>
-              <a:rPr lang="en-US" dirty="0"/>
-            </a:br>
-            <a:r>
-              <a:rPr lang="en-US" dirty="0"/>
-              <a:t>Push-Pull and Open-Drain</a:t>
-            </a:r>
-          </a:p>
-        </p:txBody>
-      </p:sp>
-      <p:sp>
-        <p:nvSpPr>
-          <p:cNvPr id="3" name="Slide Number Placeholder 2"/>
-          <p:cNvSpPr>
-            <a:spLocks noGrp="1"/>
-          </p:cNvSpPr>
-          <p:nvPr>
-            <p:ph type="sldNum" sz="quarter" idx="12"/>
-          </p:nvPr>
-        </p:nvSpPr>
-        <p:spPr/>
-        <p:txBody>
-          <a:bodyPr/>
-          <a:lstStyle/>
-          <a:p>
-            <a:pPr eaLnBrk="1" latinLnBrk="0" hangingPunct="1"/>
-            <a:fld id="{EA7C8D44-3667-46F6-9772-CC52308E2A7F}" type="slidenum">
-              <a:rPr kumimoji="0" lang="en-US" smtClean="0"/>
-              <a:pPr eaLnBrk="1" latinLnBrk="0" hangingPunct="1"/>
-              <a:t>24</a:t>
-            </a:fld>
-            <a:endParaRPr kumimoji="0" lang="en-US" dirty="0"/>
-          </a:p>
-        </p:txBody>
-      </p:sp>
-      <p:sp>
-        <p:nvSpPr>
-          <p:cNvPr id="5" name="Rectangle 4"/>
-          <p:cNvSpPr>
-            <a:spLocks noChangeArrowheads="1"/>
-          </p:cNvSpPr>
-          <p:nvPr/>
-        </p:nvSpPr>
-        <p:spPr bwMode="auto">
-          <a:xfrm>
-            <a:off x="0" y="0"/>
-            <a:ext cx="9144000" cy="0"/>
-          </a:xfrm>
-          <a:prstGeom prst="rect">
-            <a:avLst/>
-          </a:prstGeom>
-          <a:noFill/>
-          <a:ln>
-            <a:noFill/>
-          </a:ln>
-          <a:effectLst/>
-          <a:extLst>
-            <a:ext uri="{909E8E84-426E-40DD-AFC4-6F175D3DCCD1}">
-              <a14:hiddenFill xmlns:a14="http://schemas.microsoft.com/office/drawing/2010/main">
-                <a:solidFill>
-                  <a:schemeClr val="accent1"/>
-                </a:solidFill>
-              </a14:hiddenFill>
-            </a:ext>
-            <a:ext uri="{91240B29-F687-4F45-9708-019B960494DF}">
-              <a14:hiddenLine xmlns:a14="http://schemas.microsoft.com/office/drawing/2010/main" w="9525">
-                <a:solidFill>
-                  <a:schemeClr val="tx1"/>
-                </a:solidFill>
-                <a:miter lim="800000"/>
-                <a:headEnd/>
-                <a:tailEnd/>
-              </a14:hiddenLine>
-            </a:ext>
-            <a:ext uri="{AF507438-7753-43E0-B8FC-AC1667EBCBE1}">
-              <a14:hiddenEffects xmlns:a14="http://schemas.microsoft.com/office/drawing/2010/main">
-                <a:effectLst>
-                  <a:outerShdw dist="35921" dir="2700000" algn="ctr" rotWithShape="0">
-                    <a:schemeClr val="bg2"/>
-                  </a:outerShdw>
-                </a:effectLst>
-              </a14:hiddenEffects>
-            </a:ext>
-          </a:extLst>
-        </p:spPr>
-        <p:txBody>
-          <a:bodyPr vert="horz" wrap="none" lIns="91440" tIns="45720" rIns="91440" bIns="45720" numCol="1" anchor="ctr" anchorCtr="0" compatLnSpc="1">
-            <a:prstTxWarp prst="textNoShape">
-              <a:avLst/>
-            </a:prstTxWarp>
-            <a:spAutoFit/>
-          </a:bodyPr>
-          <a:lstStyle/>
-          <a:p>
-            <a:endParaRPr lang="en-US"/>
-          </a:p>
-        </p:txBody>
-      </p:sp>
-      <p:sp>
-        <p:nvSpPr>
-          <p:cNvPr id="7" name="Rectangle 6"/>
-          <p:cNvSpPr>
-            <a:spLocks noChangeArrowheads="1"/>
-          </p:cNvSpPr>
-          <p:nvPr/>
-        </p:nvSpPr>
-        <p:spPr bwMode="auto">
-          <a:xfrm>
-            <a:off x="0" y="0"/>
-            <a:ext cx="9144000" cy="0"/>
-          </a:xfrm>
-          <a:prstGeom prst="rect">
-            <a:avLst/>
-          </a:prstGeom>
-          <a:noFill/>
-          <a:ln>
-            <a:noFill/>
-          </a:ln>
-          <a:effectLst/>
-          <a:extLst>
-            <a:ext uri="{909E8E84-426E-40DD-AFC4-6F175D3DCCD1}">
-              <a14:hiddenFill xmlns:a14="http://schemas.microsoft.com/office/drawing/2010/main">
-                <a:solidFill>
-                  <a:schemeClr val="accent1"/>
-                </a:solidFill>
-              </a14:hiddenFill>
-            </a:ext>
-            <a:ext uri="{91240B29-F687-4F45-9708-019B960494DF}">
-              <a14:hiddenLine xmlns:a14="http://schemas.microsoft.com/office/drawing/2010/main" w="9525">
-                <a:solidFill>
-                  <a:schemeClr val="tx1"/>
-                </a:solidFill>
-                <a:miter lim="800000"/>
-                <a:headEnd/>
-                <a:tailEnd/>
-              </a14:hiddenLine>
-            </a:ext>
-            <a:ext uri="{AF507438-7753-43E0-B8FC-AC1667EBCBE1}">
-              <a14:hiddenEffects xmlns:a14="http://schemas.microsoft.com/office/drawing/2010/main">
-                <a:effectLst>
-                  <a:outerShdw dist="35921" dir="2700000" algn="ctr" rotWithShape="0">
-                    <a:schemeClr val="bg2"/>
-                  </a:outerShdw>
-                </a:effectLst>
-              </a14:hiddenEffects>
-            </a:ext>
-          </a:extLst>
-        </p:spPr>
-        <p:txBody>
-          <a:bodyPr vert="horz" wrap="none" lIns="91440" tIns="45720" rIns="91440" bIns="45720" numCol="1" anchor="ctr" anchorCtr="0" compatLnSpc="1">
-            <a:prstTxWarp prst="textNoShape">
-              <a:avLst/>
-            </a:prstTxWarp>
-            <a:spAutoFit/>
-          </a:bodyPr>
-          <a:lstStyle/>
-          <a:p>
-            <a:endParaRPr lang="en-US"/>
-          </a:p>
-        </p:txBody>
-      </p:sp>
-      <p:sp>
-        <p:nvSpPr>
-          <p:cNvPr id="4" name="Rectangle 3"/>
-          <p:cNvSpPr/>
-          <p:nvPr/>
-        </p:nvSpPr>
-        <p:spPr>
-          <a:xfrm>
-            <a:off x="685800" y="1676400"/>
-            <a:ext cx="1313180" cy="461665"/>
-          </a:xfrm>
-          <a:prstGeom prst="rect">
-            <a:avLst/>
-          </a:prstGeom>
-        </p:spPr>
-        <p:txBody>
-          <a:bodyPr wrap="none">
-            <a:spAutoFit/>
-          </a:bodyPr>
-          <a:lstStyle/>
-          <a:p>
-            <a:r>
-              <a:rPr lang="en-US" sz="2400" dirty="0">
-                <a:solidFill>
-                  <a:srgbClr val="C00000"/>
-                </a:solidFill>
-              </a:rPr>
-              <a:t>Push-Pull</a:t>
-            </a:r>
-          </a:p>
-        </p:txBody>
-      </p:sp>
-      <p:cxnSp>
-        <p:nvCxnSpPr>
-          <p:cNvPr id="13" name="Straight Arrow Connector 12"/>
-          <p:cNvCxnSpPr/>
-          <p:nvPr/>
-        </p:nvCxnSpPr>
-        <p:spPr>
-          <a:xfrm flipV="1">
-            <a:off x="3124200" y="2514600"/>
-            <a:ext cx="1828800" cy="1104900"/>
-          </a:xfrm>
-          <a:prstGeom prst="straightConnector1">
-            <a:avLst/>
-          </a:prstGeom>
-          <a:ln w="19050">
-            <a:tailEnd type="arrow"/>
-          </a:ln>
-        </p:spPr>
-        <p:style>
-          <a:lnRef idx="1">
-            <a:schemeClr val="accent1"/>
-          </a:lnRef>
-          <a:fillRef idx="0">
-            <a:schemeClr val="accent1"/>
-          </a:fillRef>
-          <a:effectRef idx="0">
-            <a:schemeClr val="accent1"/>
-          </a:effectRef>
-          <a:fontRef idx="minor">
-            <a:schemeClr val="tx1"/>
-          </a:fontRef>
-        </p:style>
-      </p:cxnSp>
-      <p:cxnSp>
-        <p:nvCxnSpPr>
-          <p:cNvPr id="15" name="Straight Arrow Connector 14"/>
-          <p:cNvCxnSpPr/>
-          <p:nvPr/>
-        </p:nvCxnSpPr>
-        <p:spPr>
-          <a:xfrm>
-            <a:off x="3124200" y="3886200"/>
-            <a:ext cx="1981200" cy="1066800"/>
-          </a:xfrm>
-          <a:prstGeom prst="straightConnector1">
-            <a:avLst/>
-          </a:prstGeom>
-          <a:ln w="19050">
-            <a:tailEnd type="arrow"/>
-          </a:ln>
-        </p:spPr>
-        <p:style>
-          <a:lnRef idx="1">
-            <a:schemeClr val="accent1"/>
-          </a:lnRef>
-          <a:fillRef idx="0">
-            <a:schemeClr val="accent1"/>
-          </a:fillRef>
-          <a:effectRef idx="0">
-            <a:schemeClr val="accent1"/>
-          </a:effectRef>
-          <a:fontRef idx="minor">
-            <a:schemeClr val="tx1"/>
-          </a:fontRef>
-        </p:style>
-      </p:cxnSp>
-      <p:sp>
-        <p:nvSpPr>
-          <p:cNvPr id="16" name="TextBox 15"/>
-          <p:cNvSpPr txBox="1"/>
-          <p:nvPr/>
-        </p:nvSpPr>
-        <p:spPr>
-          <a:xfrm>
-            <a:off x="3048000" y="2329934"/>
-            <a:ext cx="1371600" cy="646331"/>
-          </a:xfrm>
-          <a:prstGeom prst="rect">
-            <a:avLst/>
-          </a:prstGeom>
-          <a:noFill/>
-        </p:spPr>
-        <p:txBody>
-          <a:bodyPr wrap="square" rtlCol="0">
-            <a:spAutoFit/>
-          </a:bodyPr>
-          <a:lstStyle/>
-          <a:p>
-            <a:r>
-              <a:rPr lang="en-US" dirty="0"/>
-              <a:t>If 0, connect to ground</a:t>
-            </a:r>
-          </a:p>
-        </p:txBody>
-      </p:sp>
-      <p:sp>
-        <p:nvSpPr>
-          <p:cNvPr id="17" name="TextBox 16"/>
-          <p:cNvSpPr txBox="1"/>
-          <p:nvPr/>
-        </p:nvSpPr>
-        <p:spPr>
-          <a:xfrm>
-            <a:off x="3095231" y="4495800"/>
-            <a:ext cx="1371600" cy="646331"/>
-          </a:xfrm>
-          <a:prstGeom prst="rect">
-            <a:avLst/>
-          </a:prstGeom>
-          <a:noFill/>
-        </p:spPr>
-        <p:txBody>
-          <a:bodyPr wrap="square" rtlCol="0">
-            <a:spAutoFit/>
-          </a:bodyPr>
-          <a:lstStyle/>
-          <a:p>
-            <a:r>
-              <a:rPr lang="en-US" dirty="0"/>
-              <a:t>If 1, connect to </a:t>
-            </a:r>
-            <a:r>
-              <a:rPr lang="en-US" dirty="0" err="1"/>
-              <a:t>Vcc</a:t>
-            </a:r>
-            <a:endParaRPr lang="en-US" dirty="0"/>
-          </a:p>
-        </p:txBody>
-      </p:sp>
-      <p:pic>
-        <p:nvPicPr>
-          <p:cNvPr id="18" name="Picture 17"/>
-          <p:cNvPicPr>
-            <a:picLocks noChangeAspect="1"/>
-          </p:cNvPicPr>
-          <p:nvPr/>
-        </p:nvPicPr>
-        <p:blipFill>
-          <a:blip r:embed="rId2"/>
-          <a:stretch>
-            <a:fillRect/>
-          </a:stretch>
-        </p:blipFill>
-        <p:spPr>
-          <a:xfrm>
-            <a:off x="133547" y="2688770"/>
-            <a:ext cx="2923031" cy="2394859"/>
-          </a:xfrm>
-          <a:prstGeom prst="rect">
-            <a:avLst/>
-          </a:prstGeom>
-        </p:spPr>
-      </p:pic>
-      <p:pic>
-        <p:nvPicPr>
-          <p:cNvPr id="20" name="Picture 19"/>
-          <p:cNvPicPr>
-            <a:picLocks noChangeAspect="1"/>
-          </p:cNvPicPr>
-          <p:nvPr/>
-        </p:nvPicPr>
-        <p:blipFill>
-          <a:blip r:embed="rId3"/>
-          <a:stretch>
-            <a:fillRect/>
-          </a:stretch>
-        </p:blipFill>
-        <p:spPr>
-          <a:xfrm>
-            <a:off x="5189647" y="3766559"/>
-            <a:ext cx="2523178" cy="2372882"/>
-          </a:xfrm>
-          <a:prstGeom prst="rect">
-            <a:avLst/>
-          </a:prstGeom>
-        </p:spPr>
-      </p:pic>
-      <p:pic>
-        <p:nvPicPr>
-          <p:cNvPr id="21" name="Picture 20"/>
-          <p:cNvPicPr>
-            <a:picLocks noChangeAspect="1"/>
-          </p:cNvPicPr>
-          <p:nvPr/>
-        </p:nvPicPr>
-        <p:blipFill>
-          <a:blip r:embed="rId4"/>
-          <a:stretch>
-            <a:fillRect/>
-          </a:stretch>
-        </p:blipFill>
-        <p:spPr>
-          <a:xfrm>
-            <a:off x="5156396" y="1301418"/>
-            <a:ext cx="2592578" cy="2359861"/>
-          </a:xfrm>
-          <a:prstGeom prst="rect">
-            <a:avLst/>
-          </a:prstGeom>
-        </p:spPr>
-      </p:pic>
-    </p:spTree>
-    <p:extLst>
-      <p:ext uri="{BB962C8B-B14F-4D97-AF65-F5344CB8AC3E}">
-        <p14:creationId xmlns:p14="http://schemas.microsoft.com/office/powerpoint/2010/main" val="210484945"/>
-      </p:ext>
-    </p:extLst>
-  </p:cSld>
-  <p:clrMapOvr>
-    <a:masterClrMapping/>
-  </p:clrMapOvr>
-</p:sld>
-</file>
-
-<file path=ppt/slides/slide25.xml><?xml version="1.0" encoding="utf-8"?>
-<p:sld xmlns:a="http://schemas.openxmlformats.org/drawingml/2006/main" xmlns:r="http://schemas.openxmlformats.org/officeDocument/2006/relationships" xmlns:p="http://schemas.openxmlformats.org/presentationml/2006/main">
-  <p:cSld>
-    <p:spTree>
-      <p:nvGrpSpPr>
-        <p:cNvPr id="1" name=""/>
-        <p:cNvGrpSpPr/>
-        <p:nvPr/>
-      </p:nvGrpSpPr>
-      <p:grpSpPr>
-        <a:xfrm>
-          <a:off x="0" y="0"/>
-          <a:ext cx="0" cy="0"/>
-          <a:chOff x="0" y="0"/>
-          <a:chExt cx="0" cy="0"/>
-        </a:xfrm>
-      </p:grpSpPr>
-      <p:sp>
-        <p:nvSpPr>
-          <p:cNvPr id="2" name="Title 1"/>
-          <p:cNvSpPr>
-            <a:spLocks noGrp="1"/>
-          </p:cNvSpPr>
-          <p:nvPr>
-            <p:ph type="title"/>
-          </p:nvPr>
-        </p:nvSpPr>
-        <p:spPr/>
-        <p:txBody>
-          <a:bodyPr>
-            <a:normAutofit fontScale="90000"/>
-          </a:bodyPr>
-          <a:lstStyle/>
-          <a:p>
-            <a:r>
-              <a:rPr lang="en-US" dirty="0"/>
-              <a:t>GPIO Output Modes: </a:t>
-            </a:r>
-            <a:br>
-              <a:rPr lang="en-US" dirty="0"/>
-            </a:br>
-            <a:r>
-              <a:rPr lang="en-US" dirty="0"/>
-              <a:t>Push-Pull and Open-Drain</a:t>
-            </a:r>
-          </a:p>
-        </p:txBody>
-      </p:sp>
-      <p:sp>
-        <p:nvSpPr>
-          <p:cNvPr id="3" name="Slide Number Placeholder 2"/>
-          <p:cNvSpPr>
-            <a:spLocks noGrp="1"/>
-          </p:cNvSpPr>
-          <p:nvPr>
-            <p:ph type="sldNum" sz="quarter" idx="12"/>
-          </p:nvPr>
-        </p:nvSpPr>
-        <p:spPr/>
-        <p:txBody>
-          <a:bodyPr/>
-          <a:lstStyle/>
-          <a:p>
-            <a:pPr eaLnBrk="1" latinLnBrk="0" hangingPunct="1"/>
-            <a:fld id="{EA7C8D44-3667-46F6-9772-CC52308E2A7F}" type="slidenum">
-              <a:rPr kumimoji="0" lang="en-US" smtClean="0"/>
-              <a:pPr eaLnBrk="1" latinLnBrk="0" hangingPunct="1"/>
-              <a:t>25</a:t>
-            </a:fld>
-            <a:endParaRPr kumimoji="0" lang="en-US" dirty="0"/>
-          </a:p>
-        </p:txBody>
-      </p:sp>
-      <p:sp>
-        <p:nvSpPr>
-          <p:cNvPr id="5" name="Rectangle 4"/>
-          <p:cNvSpPr>
-            <a:spLocks noChangeArrowheads="1"/>
-          </p:cNvSpPr>
-          <p:nvPr/>
-        </p:nvSpPr>
-        <p:spPr bwMode="auto">
-          <a:xfrm>
-            <a:off x="0" y="0"/>
-            <a:ext cx="9144000" cy="0"/>
-          </a:xfrm>
-          <a:prstGeom prst="rect">
-            <a:avLst/>
-          </a:prstGeom>
-          <a:noFill/>
-          <a:ln>
-            <a:noFill/>
-          </a:ln>
-          <a:effectLst/>
-          <a:extLst>
-            <a:ext uri="{909E8E84-426E-40DD-AFC4-6F175D3DCCD1}">
-              <a14:hiddenFill xmlns:a14="http://schemas.microsoft.com/office/drawing/2010/main">
-                <a:solidFill>
-                  <a:schemeClr val="accent1"/>
-                </a:solidFill>
-              </a14:hiddenFill>
-            </a:ext>
-            <a:ext uri="{91240B29-F687-4F45-9708-019B960494DF}">
-              <a14:hiddenLine xmlns:a14="http://schemas.microsoft.com/office/drawing/2010/main" w="9525">
-                <a:solidFill>
-                  <a:schemeClr val="tx1"/>
-                </a:solidFill>
-                <a:miter lim="800000"/>
-                <a:headEnd/>
-                <a:tailEnd/>
-              </a14:hiddenLine>
-            </a:ext>
-            <a:ext uri="{AF507438-7753-43E0-B8FC-AC1667EBCBE1}">
-              <a14:hiddenEffects xmlns:a14="http://schemas.microsoft.com/office/drawing/2010/main">
-                <a:effectLst>
-                  <a:outerShdw dist="35921" dir="2700000" algn="ctr" rotWithShape="0">
-                    <a:schemeClr val="bg2"/>
-                  </a:outerShdw>
-                </a:effectLst>
-              </a14:hiddenEffects>
-            </a:ext>
-          </a:extLst>
-        </p:spPr>
-        <p:txBody>
-          <a:bodyPr vert="horz" wrap="none" lIns="91440" tIns="45720" rIns="91440" bIns="45720" numCol="1" anchor="ctr" anchorCtr="0" compatLnSpc="1">
-            <a:prstTxWarp prst="textNoShape">
-              <a:avLst/>
-            </a:prstTxWarp>
-            <a:spAutoFit/>
-          </a:bodyPr>
-          <a:lstStyle/>
-          <a:p>
-            <a:endParaRPr lang="en-US"/>
-          </a:p>
-        </p:txBody>
-      </p:sp>
-      <p:sp>
-        <p:nvSpPr>
-          <p:cNvPr id="7" name="Rectangle 6"/>
-          <p:cNvSpPr>
-            <a:spLocks noChangeArrowheads="1"/>
-          </p:cNvSpPr>
-          <p:nvPr/>
-        </p:nvSpPr>
-        <p:spPr bwMode="auto">
-          <a:xfrm>
-            <a:off x="0" y="0"/>
-            <a:ext cx="9144000" cy="0"/>
-          </a:xfrm>
-          <a:prstGeom prst="rect">
-            <a:avLst/>
-          </a:prstGeom>
-          <a:noFill/>
-          <a:ln>
-            <a:noFill/>
-          </a:ln>
-          <a:effectLst/>
-          <a:extLst>
-            <a:ext uri="{909E8E84-426E-40DD-AFC4-6F175D3DCCD1}">
-              <a14:hiddenFill xmlns:a14="http://schemas.microsoft.com/office/drawing/2010/main">
-                <a:solidFill>
-                  <a:schemeClr val="accent1"/>
-                </a:solidFill>
-              </a14:hiddenFill>
-            </a:ext>
-            <a:ext uri="{91240B29-F687-4F45-9708-019B960494DF}">
-              <a14:hiddenLine xmlns:a14="http://schemas.microsoft.com/office/drawing/2010/main" w="9525">
-                <a:solidFill>
-                  <a:schemeClr val="tx1"/>
-                </a:solidFill>
-                <a:miter lim="800000"/>
-                <a:headEnd/>
-                <a:tailEnd/>
-              </a14:hiddenLine>
-            </a:ext>
-            <a:ext uri="{AF507438-7753-43E0-B8FC-AC1667EBCBE1}">
-              <a14:hiddenEffects xmlns:a14="http://schemas.microsoft.com/office/drawing/2010/main">
-                <a:effectLst>
-                  <a:outerShdw dist="35921" dir="2700000" algn="ctr" rotWithShape="0">
-                    <a:schemeClr val="bg2"/>
-                  </a:outerShdw>
-                </a:effectLst>
-              </a14:hiddenEffects>
-            </a:ext>
-          </a:extLst>
-        </p:spPr>
-        <p:txBody>
-          <a:bodyPr vert="horz" wrap="none" lIns="91440" tIns="45720" rIns="91440" bIns="45720" numCol="1" anchor="ctr" anchorCtr="0" compatLnSpc="1">
-            <a:prstTxWarp prst="textNoShape">
-              <a:avLst/>
-            </a:prstTxWarp>
-            <a:spAutoFit/>
-          </a:bodyPr>
-          <a:lstStyle/>
-          <a:p>
-            <a:endParaRPr lang="en-US"/>
-          </a:p>
-        </p:txBody>
-      </p:sp>
-      <p:sp>
-        <p:nvSpPr>
-          <p:cNvPr id="4" name="Rectangle 3"/>
-          <p:cNvSpPr/>
-          <p:nvPr/>
-        </p:nvSpPr>
-        <p:spPr>
-          <a:xfrm>
-            <a:off x="685800" y="1676400"/>
-            <a:ext cx="1697901" cy="461665"/>
-          </a:xfrm>
-          <a:prstGeom prst="rect">
-            <a:avLst/>
-          </a:prstGeom>
-        </p:spPr>
-        <p:txBody>
-          <a:bodyPr wrap="none">
-            <a:spAutoFit/>
-          </a:bodyPr>
-          <a:lstStyle/>
-          <a:p>
-            <a:r>
-              <a:rPr lang="en-US" sz="2400" dirty="0">
-                <a:solidFill>
-                  <a:srgbClr val="C00000"/>
-                </a:solidFill>
-              </a:rPr>
-              <a:t>Open-Drain</a:t>
-            </a:r>
-          </a:p>
-        </p:txBody>
-      </p:sp>
-      <p:cxnSp>
-        <p:nvCxnSpPr>
-          <p:cNvPr id="13" name="Straight Arrow Connector 12"/>
-          <p:cNvCxnSpPr/>
-          <p:nvPr/>
-        </p:nvCxnSpPr>
-        <p:spPr>
-          <a:xfrm flipV="1">
-            <a:off x="3124200" y="2514600"/>
-            <a:ext cx="1828800" cy="1104900"/>
-          </a:xfrm>
-          <a:prstGeom prst="straightConnector1">
-            <a:avLst/>
-          </a:prstGeom>
-          <a:ln w="19050">
-            <a:tailEnd type="arrow"/>
-          </a:ln>
-        </p:spPr>
-        <p:style>
-          <a:lnRef idx="1">
-            <a:schemeClr val="accent1"/>
-          </a:lnRef>
-          <a:fillRef idx="0">
-            <a:schemeClr val="accent1"/>
-          </a:fillRef>
-          <a:effectRef idx="0">
-            <a:schemeClr val="accent1"/>
-          </a:effectRef>
-          <a:fontRef idx="minor">
-            <a:schemeClr val="tx1"/>
-          </a:fontRef>
-        </p:style>
-      </p:cxnSp>
-      <p:cxnSp>
-        <p:nvCxnSpPr>
-          <p:cNvPr id="15" name="Straight Arrow Connector 14"/>
-          <p:cNvCxnSpPr/>
-          <p:nvPr/>
-        </p:nvCxnSpPr>
-        <p:spPr>
-          <a:xfrm>
-            <a:off x="3124200" y="3886200"/>
-            <a:ext cx="1981200" cy="1066800"/>
-          </a:xfrm>
-          <a:prstGeom prst="straightConnector1">
-            <a:avLst/>
-          </a:prstGeom>
-          <a:ln w="19050">
-            <a:tailEnd type="arrow"/>
-          </a:ln>
-        </p:spPr>
-        <p:style>
-          <a:lnRef idx="1">
-            <a:schemeClr val="accent1"/>
-          </a:lnRef>
-          <a:fillRef idx="0">
-            <a:schemeClr val="accent1"/>
-          </a:fillRef>
-          <a:effectRef idx="0">
-            <a:schemeClr val="accent1"/>
-          </a:effectRef>
-          <a:fontRef idx="minor">
-            <a:schemeClr val="tx1"/>
-          </a:fontRef>
-        </p:style>
-      </p:cxnSp>
-      <p:sp>
-        <p:nvSpPr>
-          <p:cNvPr id="16" name="TextBox 15"/>
-          <p:cNvSpPr txBox="1"/>
-          <p:nvPr/>
-        </p:nvSpPr>
-        <p:spPr>
-          <a:xfrm>
-            <a:off x="3048000" y="2329934"/>
-            <a:ext cx="1371600" cy="646331"/>
-          </a:xfrm>
-          <a:prstGeom prst="rect">
-            <a:avLst/>
-          </a:prstGeom>
-          <a:noFill/>
-        </p:spPr>
-        <p:txBody>
-          <a:bodyPr wrap="square" rtlCol="0">
-            <a:spAutoFit/>
-          </a:bodyPr>
-          <a:lstStyle/>
-          <a:p>
-            <a:r>
-              <a:rPr lang="en-US" dirty="0"/>
-              <a:t>If 0, connect to ground</a:t>
-            </a:r>
-          </a:p>
-        </p:txBody>
-      </p:sp>
-      <p:sp>
-        <p:nvSpPr>
-          <p:cNvPr id="17" name="TextBox 16"/>
-          <p:cNvSpPr txBox="1"/>
-          <p:nvPr/>
-        </p:nvSpPr>
-        <p:spPr>
-          <a:xfrm>
-            <a:off x="3095231" y="4495800"/>
-            <a:ext cx="1371600" cy="646331"/>
-          </a:xfrm>
-          <a:prstGeom prst="rect">
-            <a:avLst/>
-          </a:prstGeom>
-          <a:noFill/>
-        </p:spPr>
-        <p:txBody>
-          <a:bodyPr wrap="square" rtlCol="0">
-            <a:spAutoFit/>
-          </a:bodyPr>
-          <a:lstStyle/>
-          <a:p>
-            <a:r>
-              <a:rPr lang="en-US" dirty="0"/>
-              <a:t>If 1, connect to </a:t>
-            </a:r>
-            <a:r>
-              <a:rPr lang="en-US" dirty="0" err="1"/>
-              <a:t>Vcc</a:t>
-            </a:r>
-            <a:endParaRPr lang="en-US" dirty="0"/>
-          </a:p>
-        </p:txBody>
-      </p:sp>
-      <p:pic>
-        <p:nvPicPr>
-          <p:cNvPr id="20" name="Picture 19"/>
-          <p:cNvPicPr>
-            <a:picLocks noChangeAspect="1"/>
-          </p:cNvPicPr>
-          <p:nvPr/>
-        </p:nvPicPr>
-        <p:blipFill>
-          <a:blip r:embed="rId2"/>
-          <a:stretch>
-            <a:fillRect/>
-          </a:stretch>
-        </p:blipFill>
-        <p:spPr>
-          <a:xfrm>
-            <a:off x="457200" y="2819400"/>
-            <a:ext cx="2670992" cy="1852098"/>
-          </a:xfrm>
-          <a:prstGeom prst="rect">
-            <a:avLst/>
-          </a:prstGeom>
-        </p:spPr>
-      </p:pic>
-      <p:pic>
-        <p:nvPicPr>
-          <p:cNvPr id="21" name="Picture 20"/>
-          <p:cNvPicPr>
-            <a:picLocks noChangeAspect="1"/>
-          </p:cNvPicPr>
-          <p:nvPr/>
-        </p:nvPicPr>
-        <p:blipFill>
-          <a:blip r:embed="rId3"/>
-          <a:stretch>
-            <a:fillRect/>
-          </a:stretch>
-        </p:blipFill>
-        <p:spPr>
-          <a:xfrm>
-            <a:off x="5130729" y="1516395"/>
-            <a:ext cx="3224213" cy="2068470"/>
-          </a:xfrm>
-          <a:prstGeom prst="rect">
-            <a:avLst/>
-          </a:prstGeom>
-        </p:spPr>
-      </p:pic>
-      <p:pic>
-        <p:nvPicPr>
-          <p:cNvPr id="22" name="Picture 21"/>
-          <p:cNvPicPr>
-            <a:picLocks noChangeAspect="1"/>
-          </p:cNvPicPr>
-          <p:nvPr/>
-        </p:nvPicPr>
-        <p:blipFill>
-          <a:blip r:embed="rId4"/>
-          <a:stretch>
-            <a:fillRect/>
-          </a:stretch>
-        </p:blipFill>
-        <p:spPr>
-          <a:xfrm>
-            <a:off x="5175309" y="3876502"/>
-            <a:ext cx="3109969" cy="2068470"/>
-          </a:xfrm>
-          <a:prstGeom prst="rect">
-            <a:avLst/>
-          </a:prstGeom>
-        </p:spPr>
-      </p:pic>
-    </p:spTree>
-    <p:extLst>
-      <p:ext uri="{BB962C8B-B14F-4D97-AF65-F5344CB8AC3E}">
-        <p14:creationId xmlns:p14="http://schemas.microsoft.com/office/powerpoint/2010/main" val="3054749938"/>
-      </p:ext>
-    </p:extLst>
-  </p:cSld>
-  <p:clrMapOvr>
-    <a:masterClrMapping/>
-  </p:clrMapOvr>
-</p:sld>
-</file>
-
-<file path=ppt/slides/slide26.xml><?xml version="1.0" encoding="utf-8"?>
-<p:sld xmlns:a="http://schemas.openxmlformats.org/drawingml/2006/main" xmlns:r="http://schemas.openxmlformats.org/officeDocument/2006/relationships" xmlns:p="http://schemas.openxmlformats.org/presentationml/2006/main">
-  <p:cSld>
-    <p:spTree>
-      <p:nvGrpSpPr>
-        <p:cNvPr id="1" name=""/>
-        <p:cNvGrpSpPr/>
-        <p:nvPr/>
-      </p:nvGrpSpPr>
-      <p:grpSpPr>
-        <a:xfrm>
-          <a:off x="0" y="0"/>
-          <a:ext cx="0" cy="0"/>
-          <a:chOff x="0" y="0"/>
-          <a:chExt cx="0" cy="0"/>
-        </a:xfrm>
-      </p:grpSpPr>
-      <p:sp>
-        <p:nvSpPr>
-          <p:cNvPr id="2" name="Title 1"/>
-          <p:cNvSpPr>
-            <a:spLocks noGrp="1"/>
-          </p:cNvSpPr>
-          <p:nvPr>
-            <p:ph type="title"/>
-          </p:nvPr>
-        </p:nvSpPr>
-        <p:spPr/>
-        <p:txBody>
-          <a:bodyPr/>
-          <a:lstStyle/>
-          <a:p>
-            <a:r>
-              <a:rPr lang="en-US" dirty="0"/>
-              <a:t>Timer’s Clock</a:t>
-            </a:r>
-          </a:p>
-        </p:txBody>
-      </p:sp>
-      <p:sp>
-        <p:nvSpPr>
-          <p:cNvPr id="3" name="Slide Number Placeholder 2"/>
-          <p:cNvSpPr>
-            <a:spLocks noGrp="1"/>
-          </p:cNvSpPr>
-          <p:nvPr>
-            <p:ph type="sldNum" sz="quarter" idx="12"/>
-          </p:nvPr>
-        </p:nvSpPr>
-        <p:spPr/>
-        <p:txBody>
-          <a:bodyPr/>
-          <a:lstStyle/>
-          <a:p>
-            <a:fld id="{EA7C8D44-3667-46F6-9772-CC52308E2A7F}" type="slidenum">
-              <a:rPr kumimoji="0" lang="en-US" smtClean="0"/>
-              <a:pPr/>
-              <a:t>26</a:t>
+              <a:t>19</a:t>
             </a:fld>
             <a:endParaRPr kumimoji="0" lang="en-US" dirty="0"/>
           </a:p>
@@ -17698,7 +14976,187 @@
 </p:sld>
 </file>
 
-<file path=ppt/slides/slide27.xml><?xml version="1.0" encoding="utf-8"?>
+<file path=ppt/slides/slide2.xml><?xml version="1.0" encoding="utf-8"?>
+<p:sld xmlns:a="http://schemas.openxmlformats.org/drawingml/2006/main" xmlns:r="http://schemas.openxmlformats.org/officeDocument/2006/relationships" xmlns:p="http://schemas.openxmlformats.org/presentationml/2006/main">
+  <p:cSld>
+    <p:spTree>
+      <p:nvGrpSpPr>
+        <p:cNvPr id="1" name=""/>
+        <p:cNvGrpSpPr/>
+        <p:nvPr/>
+      </p:nvGrpSpPr>
+      <p:grpSpPr>
+        <a:xfrm>
+          <a:off x="0" y="0"/>
+          <a:ext cx="0" cy="0"/>
+          <a:chOff x="0" y="0"/>
+          <a:chExt cx="0" cy="0"/>
+        </a:xfrm>
+      </p:grpSpPr>
+      <p:sp>
+        <p:nvSpPr>
+          <p:cNvPr id="3" name="Slide Number Placeholder 2"/>
+          <p:cNvSpPr>
+            <a:spLocks noGrp="1"/>
+          </p:cNvSpPr>
+          <p:nvPr>
+            <p:ph type="sldNum" sz="quarter" idx="12"/>
+          </p:nvPr>
+        </p:nvSpPr>
+        <p:spPr/>
+        <p:txBody>
+          <a:bodyPr/>
+          <a:lstStyle/>
+          <a:p>
+            <a:fld id="{AEE14D4A-FE32-40AF-B06D-E9622816B101}" type="slidenum">
+              <a:rPr lang="en-US" smtClean="0"/>
+              <a:pPr/>
+              <a:t>2</a:t>
+            </a:fld>
+            <a:endParaRPr lang="en-US" dirty="0"/>
+          </a:p>
+        </p:txBody>
+      </p:sp>
+      <p:pic>
+        <p:nvPicPr>
+          <p:cNvPr id="5" name="Content Placeholder 4" descr="singer_ikea.gif"/>
+          <p:cNvPicPr>
+            <a:picLocks noGrp="1" noChangeAspect="1"/>
+          </p:cNvPicPr>
+          <p:nvPr>
+            <p:ph sz="quarter" idx="1"/>
+          </p:nvPr>
+        </p:nvPicPr>
+        <p:blipFill>
+          <a:blip r:embed="rId2" cstate="print"/>
+          <a:stretch>
+            <a:fillRect/>
+          </a:stretch>
+        </p:blipFill>
+        <p:spPr>
+          <a:xfrm>
+            <a:off x="2438400" y="1295400"/>
+            <a:ext cx="3965455" cy="5002175"/>
+          </a:xfrm>
+        </p:spPr>
+      </p:pic>
+      <p:sp>
+        <p:nvSpPr>
+          <p:cNvPr id="6" name="Oval 5"/>
+          <p:cNvSpPr/>
+          <p:nvPr/>
+        </p:nvSpPr>
+        <p:spPr>
+          <a:xfrm>
+            <a:off x="2514600" y="3012558"/>
+            <a:ext cx="2764465" cy="797442"/>
+          </a:xfrm>
+          <a:prstGeom prst="ellipse">
+            <a:avLst/>
+          </a:prstGeom>
+          <a:noFill/>
+          <a:ln w="38100">
+            <a:solidFill>
+              <a:srgbClr val="C00000"/>
+            </a:solidFill>
+          </a:ln>
+        </p:spPr>
+        <p:style>
+          <a:lnRef idx="2">
+            <a:schemeClr val="accent1">
+              <a:shade val="50000"/>
+            </a:schemeClr>
+          </a:lnRef>
+          <a:fillRef idx="1">
+            <a:schemeClr val="accent1"/>
+          </a:fillRef>
+          <a:effectRef idx="0">
+            <a:schemeClr val="accent1"/>
+          </a:effectRef>
+          <a:fontRef idx="minor">
+            <a:schemeClr val="lt1"/>
+          </a:fontRef>
+        </p:style>
+        <p:txBody>
+          <a:bodyPr rtlCol="0" anchor="ctr"/>
+          <a:lstStyle/>
+          <a:p>
+            <a:pPr algn="ctr"/>
+            <a:endParaRPr lang="en-US"/>
+          </a:p>
+        </p:txBody>
+      </p:sp>
+      <p:sp>
+        <p:nvSpPr>
+          <p:cNvPr id="7" name="Title 1"/>
+          <p:cNvSpPr>
+            <a:spLocks noGrp="1"/>
+          </p:cNvSpPr>
+          <p:nvPr>
+            <p:ph type="title"/>
+          </p:nvPr>
+        </p:nvSpPr>
+        <p:spPr>
+          <a:xfrm>
+            <a:off x="457200" y="152400"/>
+            <a:ext cx="8229600" cy="990600"/>
+          </a:xfrm>
+        </p:spPr>
+        <p:txBody>
+          <a:bodyPr/>
+          <a:lstStyle/>
+          <a:p>
+            <a:pPr eaLnBrk="1" hangingPunct="1"/>
+            <a:r>
+              <a:rPr lang="en-US" dirty="0"/>
+              <a:t>Assembly Programs</a:t>
+            </a:r>
+          </a:p>
+        </p:txBody>
+      </p:sp>
+      <p:sp>
+        <p:nvSpPr>
+          <p:cNvPr id="2" name="Rectangle 1"/>
+          <p:cNvSpPr/>
+          <p:nvPr/>
+        </p:nvSpPr>
+        <p:spPr>
+          <a:xfrm>
+            <a:off x="6324600" y="5943600"/>
+            <a:ext cx="1643399" cy="261610"/>
+          </a:xfrm>
+          <a:prstGeom prst="rect">
+            <a:avLst/>
+          </a:prstGeom>
+        </p:spPr>
+        <p:txBody>
+          <a:bodyPr wrap="none">
+            <a:spAutoFit/>
+          </a:bodyPr>
+          <a:lstStyle/>
+          <a:p>
+            <a:r>
+              <a:rPr lang="en-US" sz="1100" i="1" dirty="0"/>
+              <a:t>http://www.andysinger.com/</a:t>
+            </a:r>
+          </a:p>
+        </p:txBody>
+      </p:sp>
+    </p:spTree>
+    <p:extLst>
+      <p:ext uri="{BB962C8B-B14F-4D97-AF65-F5344CB8AC3E}">
+        <p14:creationId xmlns:p14="http://schemas.microsoft.com/office/powerpoint/2010/main" val="420818316"/>
+      </p:ext>
+    </p:extLst>
+  </p:cSld>
+  <p:clrMapOvr>
+    <a:masterClrMapping/>
+  </p:clrMapOvr>
+  <p:transition/>
+</p:sld>
+</file>
+
+<file path=ppt/slides/slide20.xml><?xml version="1.0" encoding="utf-8"?>
 <p:sld xmlns:a="http://schemas.openxmlformats.org/drawingml/2006/main" xmlns:r="http://schemas.openxmlformats.org/officeDocument/2006/relationships" xmlns:p="http://schemas.openxmlformats.org/presentationml/2006/main">
   <p:cSld>
     <p:spTree>
@@ -17732,7 +15190,15 @@
           <a:p>
             <a:r>
               <a:rPr lang="en-US" dirty="0"/>
-              <a:t>PWM Duty Cycle = Ton/Time Period</a:t>
+              <a:t>PWM Duty Cycle = T</a:t>
+            </a:r>
+            <a:r>
+              <a:rPr lang="en-US" baseline="-25000" dirty="0"/>
+              <a:t>on</a:t>
+            </a:r>
+            <a:r>
+              <a:rPr lang="en-US" dirty="0"/>
+              <a:t>/Time Period</a:t>
             </a:r>
           </a:p>
         </p:txBody>
@@ -17755,7 +15221,7 @@
             <a:fld id="{EA7C8D44-3667-46F6-9772-CC52308E2A7F}" type="slidenum">
               <a:rPr kumimoji="0" lang="en-US" smtClean="0"/>
               <a:pPr/>
-              <a:t>27</a:t>
+              <a:t>20</a:t>
             </a:fld>
             <a:endParaRPr kumimoji="0" lang="en-US" dirty="0"/>
           </a:p>
@@ -18088,7 +15554,7 @@
             </p:txBody>
           </p:sp>
         </mc:Choice>
-        <mc:Fallback xmlns="" xmlns:mv="urn:schemas-microsoft-com:mac:vml">
+        <mc:Fallback xmlns:mv="urn:schemas-microsoft-com:mac:vml" xmlns="">
           <p:sp>
             <p:nvSpPr>
               <p:cNvPr id="7" name="Rectangle 6"/>
@@ -18140,242 +15606,6 @@
 </p:sld>
 </file>
 
-<file path=ppt/slides/slide28.xml><?xml version="1.0" encoding="utf-8"?>
-<p:sld xmlns:a="http://schemas.openxmlformats.org/drawingml/2006/main" xmlns:r="http://schemas.openxmlformats.org/officeDocument/2006/relationships" xmlns:p="http://schemas.openxmlformats.org/presentationml/2006/main">
-  <p:cSld>
-    <p:spTree>
-      <p:nvGrpSpPr>
-        <p:cNvPr id="1" name=""/>
-        <p:cNvGrpSpPr/>
-        <p:nvPr/>
-      </p:nvGrpSpPr>
-      <p:grpSpPr>
-        <a:xfrm>
-          <a:off x="0" y="0"/>
-          <a:ext cx="0" cy="0"/>
-          <a:chOff x="0" y="0"/>
-          <a:chExt cx="0" cy="0"/>
-        </a:xfrm>
-      </p:grpSpPr>
-      <p:sp>
-        <p:nvSpPr>
-          <p:cNvPr id="2" name="Title 1"/>
-          <p:cNvSpPr>
-            <a:spLocks noGrp="1"/>
-          </p:cNvSpPr>
-          <p:nvPr>
-            <p:ph type="title"/>
-          </p:nvPr>
-        </p:nvSpPr>
-        <p:spPr/>
-        <p:txBody>
-          <a:bodyPr/>
-          <a:lstStyle/>
-          <a:p>
-            <a:r>
-              <a:rPr lang="en-US" dirty="0"/>
-              <a:t>Input Capture</a:t>
-            </a:r>
-          </a:p>
-        </p:txBody>
-      </p:sp>
-      <p:sp>
-        <p:nvSpPr>
-          <p:cNvPr id="3" name="Slide Number Placeholder 2"/>
-          <p:cNvSpPr>
-            <a:spLocks noGrp="1"/>
-          </p:cNvSpPr>
-          <p:nvPr>
-            <p:ph type="sldNum" sz="quarter" idx="12"/>
-          </p:nvPr>
-        </p:nvSpPr>
-        <p:spPr/>
-        <p:txBody>
-          <a:bodyPr/>
-          <a:lstStyle/>
-          <a:p>
-            <a:fld id="{EA7C8D44-3667-46F6-9772-CC52308E2A7F}" type="slidenum">
-              <a:rPr kumimoji="0" lang="en-US" smtClean="0"/>
-              <a:pPr/>
-              <a:t>28</a:t>
-            </a:fld>
-            <a:endParaRPr kumimoji="0" lang="en-US" dirty="0"/>
-          </a:p>
-        </p:txBody>
-      </p:sp>
-      <p:pic>
-        <p:nvPicPr>
-          <p:cNvPr id="4" name="Picture 3"/>
-          <p:cNvPicPr>
-            <a:picLocks noChangeAspect="1"/>
-          </p:cNvPicPr>
-          <p:nvPr/>
-        </p:nvPicPr>
-        <p:blipFill>
-          <a:blip r:embed="rId2" cstate="print">
-            <a:extLst>
-              <a:ext uri="{28A0092B-C50C-407E-A947-70E740481C1C}">
-                <a14:useLocalDpi xmlns:a14="http://schemas.microsoft.com/office/drawing/2010/main" val="0"/>
-              </a:ext>
-            </a:extLst>
-          </a:blip>
-          <a:stretch>
-            <a:fillRect/>
-          </a:stretch>
-        </p:blipFill>
-        <p:spPr>
-          <a:xfrm>
-            <a:off x="762000" y="1981200"/>
-            <a:ext cx="7807976" cy="3352800"/>
-          </a:xfrm>
-          <a:prstGeom prst="rect">
-            <a:avLst/>
-          </a:prstGeom>
-        </p:spPr>
-      </p:pic>
-    </p:spTree>
-    <p:extLst>
-      <p:ext uri="{BB962C8B-B14F-4D97-AF65-F5344CB8AC3E}">
-        <p14:creationId xmlns:p14="http://schemas.microsoft.com/office/powerpoint/2010/main" val="1895128042"/>
-      </p:ext>
-    </p:extLst>
-  </p:cSld>
-  <p:clrMapOvr>
-    <a:masterClrMapping/>
-  </p:clrMapOvr>
-</p:sld>
-</file>
-
-<file path=ppt/slides/slide29.xml><?xml version="1.0" encoding="utf-8"?>
-<p:sld xmlns:a="http://schemas.openxmlformats.org/drawingml/2006/main" xmlns:r="http://schemas.openxmlformats.org/officeDocument/2006/relationships" xmlns:p="http://schemas.openxmlformats.org/presentationml/2006/main">
-  <p:cSld>
-    <p:spTree>
-      <p:nvGrpSpPr>
-        <p:cNvPr id="1" name=""/>
-        <p:cNvGrpSpPr/>
-        <p:nvPr/>
-      </p:nvGrpSpPr>
-      <p:grpSpPr>
-        <a:xfrm>
-          <a:off x="0" y="0"/>
-          <a:ext cx="0" cy="0"/>
-          <a:chOff x="0" y="0"/>
-          <a:chExt cx="0" cy="0"/>
-        </a:xfrm>
-      </p:grpSpPr>
-      <p:sp>
-        <p:nvSpPr>
-          <p:cNvPr id="2" name="Title 1"/>
-          <p:cNvSpPr>
-            <a:spLocks noGrp="1"/>
-          </p:cNvSpPr>
-          <p:nvPr>
-            <p:ph type="title"/>
-          </p:nvPr>
-        </p:nvSpPr>
-        <p:spPr/>
-        <p:txBody>
-          <a:bodyPr/>
-          <a:lstStyle/>
-          <a:p>
-            <a:r>
-              <a:rPr lang="en-US" dirty="0"/>
-              <a:t>Successive-approximation (SAR) ADC</a:t>
-            </a:r>
-          </a:p>
-        </p:txBody>
-      </p:sp>
-      <p:sp>
-        <p:nvSpPr>
-          <p:cNvPr id="3" name="Slide Number Placeholder 2"/>
-          <p:cNvSpPr>
-            <a:spLocks noGrp="1"/>
-          </p:cNvSpPr>
-          <p:nvPr>
-            <p:ph type="sldNum" sz="quarter" idx="12"/>
-          </p:nvPr>
-        </p:nvSpPr>
-        <p:spPr/>
-        <p:txBody>
-          <a:bodyPr/>
-          <a:lstStyle/>
-          <a:p>
-            <a:fld id="{EA7C8D44-3667-46F6-9772-CC52308E2A7F}" type="slidenum">
-              <a:rPr kumimoji="0" lang="en-US" smtClean="0"/>
-              <a:pPr/>
-              <a:t>29</a:t>
-            </a:fld>
-            <a:endParaRPr kumimoji="0" lang="en-US" dirty="0"/>
-          </a:p>
-        </p:txBody>
-      </p:sp>
-      <p:pic>
-        <p:nvPicPr>
-          <p:cNvPr id="2050" name="Picture 2"/>
-          <p:cNvPicPr>
-            <a:picLocks noChangeAspect="1" noChangeArrowheads="1"/>
-          </p:cNvPicPr>
-          <p:nvPr/>
-        </p:nvPicPr>
-        <p:blipFill>
-          <a:blip r:embed="rId2">
-            <a:extLst>
-              <a:ext uri="{28A0092B-C50C-407E-A947-70E740481C1C}">
-                <a14:useLocalDpi xmlns:a14="http://schemas.microsoft.com/office/drawing/2010/main" val="0"/>
-              </a:ext>
-            </a:extLst>
-          </a:blip>
-          <a:srcRect/>
-          <a:stretch>
-            <a:fillRect/>
-          </a:stretch>
-        </p:blipFill>
-        <p:spPr bwMode="auto">
-          <a:xfrm>
-            <a:off x="152400" y="2047874"/>
-            <a:ext cx="8371030" cy="3362325"/>
-          </a:xfrm>
-          <a:prstGeom prst="rect">
-            <a:avLst/>
-          </a:prstGeom>
-          <a:noFill/>
-          <a:ln>
-            <a:noFill/>
-          </a:ln>
-          <a:extLst>
-            <a:ext uri="{909E8E84-426E-40DD-AFC4-6F175D3DCCD1}">
-              <a14:hiddenFill xmlns:a14="http://schemas.microsoft.com/office/drawing/2010/main">
-                <a:solidFill>
-                  <a:schemeClr val="accent1"/>
-                </a:solidFill>
-              </a14:hiddenFill>
-            </a:ext>
-            <a:ext uri="{91240B29-F687-4F45-9708-019B960494DF}">
-              <a14:hiddenLine xmlns:a14="http://schemas.microsoft.com/office/drawing/2010/main" w="9525">
-                <a:solidFill>
-                  <a:schemeClr val="tx1"/>
-                </a:solidFill>
-                <a:miter lim="800000"/>
-                <a:headEnd/>
-                <a:tailEnd/>
-              </a14:hiddenLine>
-            </a:ext>
-          </a:extLst>
-        </p:spPr>
-      </p:pic>
-    </p:spTree>
-    <p:extLst>
-      <p:ext uri="{BB962C8B-B14F-4D97-AF65-F5344CB8AC3E}">
-        <p14:creationId xmlns:p14="http://schemas.microsoft.com/office/powerpoint/2010/main" val="3034693896"/>
-      </p:ext>
-    </p:extLst>
-  </p:cSld>
-  <p:clrMapOvr>
-    <a:masterClrMapping/>
-  </p:clrMapOvr>
-</p:sld>
-</file>
-
 <file path=ppt/slides/slide3.xml><?xml version="1.0" encoding="utf-8"?>
 <p:sld xmlns:a="http://schemas.openxmlformats.org/drawingml/2006/main" xmlns:r="http://schemas.openxmlformats.org/officeDocument/2006/relationships" xmlns:p="http://schemas.openxmlformats.org/presentationml/2006/main">
   <p:cSld>
@@ -18618,678 +15848,6 @@
     <p:extLst>
       <p:ext uri="{BB962C8B-B14F-4D97-AF65-F5344CB8AC3E}">
         <p14:creationId xmlns:p14="http://schemas.microsoft.com/office/powerpoint/2010/main" val="3665053763"/>
-      </p:ext>
-    </p:extLst>
-  </p:cSld>
-  <p:clrMapOvr>
-    <a:masterClrMapping/>
-  </p:clrMapOvr>
-</p:sld>
-</file>
-
-<file path=ppt/slides/slide30.xml><?xml version="1.0" encoding="utf-8"?>
-<p:sld xmlns:a="http://schemas.openxmlformats.org/drawingml/2006/main" xmlns:r="http://schemas.openxmlformats.org/officeDocument/2006/relationships" xmlns:p="http://schemas.openxmlformats.org/presentationml/2006/main">
-  <p:cSld>
-    <p:spTree>
-      <p:nvGrpSpPr>
-        <p:cNvPr id="1" name=""/>
-        <p:cNvGrpSpPr/>
-        <p:nvPr/>
-      </p:nvGrpSpPr>
-      <p:grpSpPr>
-        <a:xfrm>
-          <a:off x="0" y="0"/>
-          <a:ext cx="0" cy="0"/>
-          <a:chOff x="0" y="0"/>
-          <a:chExt cx="0" cy="0"/>
-        </a:xfrm>
-      </p:grpSpPr>
-      <p:sp>
-        <p:nvSpPr>
-          <p:cNvPr id="2" name="Title 1"/>
-          <p:cNvSpPr>
-            <a:spLocks noGrp="1"/>
-          </p:cNvSpPr>
-          <p:nvPr>
-            <p:ph type="title"/>
-          </p:nvPr>
-        </p:nvSpPr>
-        <p:spPr/>
-        <p:txBody>
-          <a:bodyPr/>
-          <a:lstStyle/>
-          <a:p>
-            <a:r>
-              <a:rPr lang="en-US" dirty="0"/>
-              <a:t>Successive-approximation (SAR) ADC</a:t>
-            </a:r>
-          </a:p>
-        </p:txBody>
-      </p:sp>
-      <p:sp>
-        <p:nvSpPr>
-          <p:cNvPr id="3" name="Slide Number Placeholder 2"/>
-          <p:cNvSpPr>
-            <a:spLocks noGrp="1"/>
-          </p:cNvSpPr>
-          <p:nvPr>
-            <p:ph type="sldNum" sz="quarter" idx="12"/>
-          </p:nvPr>
-        </p:nvSpPr>
-        <p:spPr/>
-        <p:txBody>
-          <a:bodyPr/>
-          <a:lstStyle/>
-          <a:p>
-            <a:fld id="{EA7C8D44-3667-46F6-9772-CC52308E2A7F}" type="slidenum">
-              <a:rPr kumimoji="0" lang="en-US" smtClean="0"/>
-              <a:pPr/>
-              <a:t>30</a:t>
-            </a:fld>
-            <a:endParaRPr kumimoji="0" lang="en-US" dirty="0"/>
-          </a:p>
-        </p:txBody>
-      </p:sp>
-      <p:pic>
-        <p:nvPicPr>
-          <p:cNvPr id="2050" name="Picture 2"/>
-          <p:cNvPicPr>
-            <a:picLocks noChangeAspect="1" noChangeArrowheads="1"/>
-          </p:cNvPicPr>
-          <p:nvPr/>
-        </p:nvPicPr>
-        <p:blipFill>
-          <a:blip r:embed="rId2">
-            <a:extLst>
-              <a:ext uri="{28A0092B-C50C-407E-A947-70E740481C1C}">
-                <a14:useLocalDpi xmlns:a14="http://schemas.microsoft.com/office/drawing/2010/main" val="0"/>
-              </a:ext>
-            </a:extLst>
-          </a:blip>
-          <a:srcRect/>
-          <a:stretch>
-            <a:fillRect/>
-          </a:stretch>
-        </p:blipFill>
-        <p:spPr bwMode="auto">
-          <a:xfrm>
-            <a:off x="304800" y="1203642"/>
-            <a:ext cx="5934482" cy="5105400"/>
-          </a:xfrm>
-          <a:prstGeom prst="rect">
-            <a:avLst/>
-          </a:prstGeom>
-          <a:noFill/>
-          <a:ln>
-            <a:noFill/>
-          </a:ln>
-          <a:extLst>
-            <a:ext uri="{909E8E84-426E-40DD-AFC4-6F175D3DCCD1}">
-              <a14:hiddenFill xmlns:a14="http://schemas.microsoft.com/office/drawing/2010/main">
-                <a:solidFill>
-                  <a:schemeClr val="accent1"/>
-                </a:solidFill>
-              </a14:hiddenFill>
-            </a:ext>
-            <a:ext uri="{91240B29-F687-4F45-9708-019B960494DF}">
-              <a14:hiddenLine xmlns:a14="http://schemas.microsoft.com/office/drawing/2010/main" w="9525">
-                <a:solidFill>
-                  <a:schemeClr val="tx1"/>
-                </a:solidFill>
-                <a:miter lim="800000"/>
-                <a:headEnd/>
-                <a:tailEnd/>
-              </a14:hiddenLine>
-            </a:ext>
-          </a:extLst>
-        </p:spPr>
-      </p:pic>
-      <p:sp>
-        <p:nvSpPr>
-          <p:cNvPr id="4" name="Rectangle 3"/>
-          <p:cNvSpPr/>
-          <p:nvPr/>
-        </p:nvSpPr>
-        <p:spPr>
-          <a:xfrm>
-            <a:off x="5638800" y="1622348"/>
-            <a:ext cx="3276600" cy="1631216"/>
-          </a:xfrm>
-          <a:prstGeom prst="rect">
-            <a:avLst/>
-          </a:prstGeom>
-        </p:spPr>
-        <p:txBody>
-          <a:bodyPr wrap="square">
-            <a:spAutoFit/>
-          </a:bodyPr>
-          <a:lstStyle/>
-          <a:p>
-            <a:pPr marL="342900" indent="-342900">
-              <a:buClr>
-                <a:schemeClr val="tx1"/>
-              </a:buClr>
-              <a:buFont typeface="Arial" panose="020B0604020202020204" pitchFamily="34" charset="0"/>
-              <a:buChar char="•"/>
-            </a:pPr>
-            <a:r>
-              <a:rPr lang="en-US" sz="2000" dirty="0">
-                <a:solidFill>
-                  <a:srgbClr val="FF0000"/>
-                </a:solidFill>
-                <a:cs typeface="Arial" charset="0"/>
-              </a:rPr>
-              <a:t>Binary search </a:t>
-            </a:r>
-            <a:r>
-              <a:rPr lang="en-US" sz="2000" dirty="0">
-                <a:cs typeface="Arial" charset="0"/>
-              </a:rPr>
-              <a:t>algorithm to gradually approaches the input voltage</a:t>
-            </a:r>
-          </a:p>
-          <a:p>
-            <a:pPr marL="342900" indent="-342900">
-              <a:buFont typeface="Arial" panose="020B0604020202020204" pitchFamily="34" charset="0"/>
-              <a:buChar char="•"/>
-            </a:pPr>
-            <a:r>
-              <a:rPr lang="en-US" sz="2000" dirty="0"/>
-              <a:t>Settle into </a:t>
-            </a:r>
-            <a:r>
-              <a:rPr lang="en-US" sz="2000" dirty="0">
-                <a:cs typeface="Arial" charset="0"/>
-              </a:rPr>
-              <a:t>±</a:t>
-            </a:r>
-            <a:r>
-              <a:rPr lang="en-US" sz="2000" dirty="0"/>
-              <a:t>½ </a:t>
-            </a:r>
-            <a:r>
-              <a:rPr lang="en-US" sz="2000" dirty="0" err="1"/>
-              <a:t>LSB</a:t>
-            </a:r>
-            <a:r>
-              <a:rPr lang="en-US" sz="2000" dirty="0"/>
-              <a:t> bound within the time allowed</a:t>
-            </a:r>
-            <a:endParaRPr lang="en-US" sz="2000" dirty="0">
-              <a:cs typeface="Arial" charset="0"/>
-            </a:endParaRPr>
-          </a:p>
-        </p:txBody>
-      </p:sp>
-      <mc:AlternateContent xmlns:mc="http://schemas.openxmlformats.org/markup-compatibility/2006" xmlns:a14="http://schemas.microsoft.com/office/drawing/2010/main">
-        <mc:Choice Requires="a14">
-          <p:sp>
-            <p:nvSpPr>
-              <p:cNvPr id="6" name="TextBox 5"/>
-              <p:cNvSpPr txBox="1"/>
-              <p:nvPr/>
-            </p:nvSpPr>
-            <p:spPr>
-              <a:xfrm>
-                <a:off x="5578268" y="3560391"/>
-                <a:ext cx="3596562" cy="425053"/>
-              </a:xfrm>
-              <a:prstGeom prst="rect">
-                <a:avLst/>
-              </a:prstGeom>
-              <a:noFill/>
-            </p:spPr>
-            <p:txBody>
-              <a:bodyPr wrap="none" rtlCol="0">
-                <a:spAutoFit/>
-              </a:bodyPr>
-              <a:lstStyle/>
-              <a:p>
-                <a:pPr/>
-                <a14:m>
-                  <m:oMathPara xmlns:m="http://schemas.openxmlformats.org/officeDocument/2006/math">
-                    <m:oMathParaPr>
-                      <m:jc m:val="centerGroup"/>
-                    </m:oMathParaPr>
-                    <m:oMath xmlns:m="http://schemas.openxmlformats.org/officeDocument/2006/math">
-                      <m:sSub>
-                        <m:sSubPr>
-                          <m:ctrlPr>
-                            <a:rPr lang="en-US" sz="2000" b="0" i="1" smtClean="0">
-                              <a:latin typeface="Cambria Math" panose="02040503050406030204" pitchFamily="18" charset="0"/>
-                            </a:rPr>
-                          </m:ctrlPr>
-                        </m:sSubPr>
-                        <m:e>
-                          <m:r>
-                            <a:rPr lang="en-US" sz="2000" b="0" i="1" smtClean="0">
-                              <a:latin typeface="Cambria Math"/>
-                            </a:rPr>
-                            <m:t>𝑇</m:t>
-                          </m:r>
-                        </m:e>
-                        <m:sub>
-                          <m:r>
-                            <a:rPr lang="en-US" sz="2000" b="0" i="1" smtClean="0">
-                              <a:latin typeface="Cambria Math"/>
-                            </a:rPr>
-                            <m:t>𝐴𝐷𝐶</m:t>
-                          </m:r>
-                        </m:sub>
-                      </m:sSub>
-                      <m:r>
-                        <a:rPr lang="en-US" sz="2000" b="0" i="1" smtClean="0">
-                          <a:latin typeface="Cambria Math"/>
-                        </a:rPr>
-                        <m:t>=</m:t>
-                      </m:r>
-                      <m:sSub>
-                        <m:sSubPr>
-                          <m:ctrlPr>
-                            <a:rPr lang="en-US" sz="2000" b="0" i="1" smtClean="0">
-                              <a:latin typeface="Cambria Math" panose="02040503050406030204" pitchFamily="18" charset="0"/>
-                            </a:rPr>
-                          </m:ctrlPr>
-                        </m:sSubPr>
-                        <m:e>
-                          <m:r>
-                            <a:rPr lang="en-US" sz="2000" b="0" i="1" smtClean="0">
-                              <a:latin typeface="Cambria Math"/>
-                            </a:rPr>
-                            <m:t>𝑇</m:t>
-                          </m:r>
-                        </m:e>
-                        <m:sub>
-                          <m:r>
-                            <a:rPr lang="en-US" sz="2000" b="0" i="1" smtClean="0">
-                              <a:latin typeface="Cambria Math"/>
-                            </a:rPr>
-                            <m:t>𝑠𝑎𝑚𝑝𝑙𝑖𝑛𝑔</m:t>
-                          </m:r>
-                        </m:sub>
-                      </m:sSub>
-                      <m:r>
-                        <a:rPr lang="en-US" sz="2000" b="0" i="1" smtClean="0">
-                          <a:latin typeface="Cambria Math"/>
-                        </a:rPr>
-                        <m:t>+</m:t>
-                      </m:r>
-                      <m:sSub>
-                        <m:sSubPr>
-                          <m:ctrlPr>
-                            <a:rPr lang="en-US" sz="2000" b="0" i="1" smtClean="0">
-                              <a:latin typeface="Cambria Math" panose="02040503050406030204" pitchFamily="18" charset="0"/>
-                            </a:rPr>
-                          </m:ctrlPr>
-                        </m:sSubPr>
-                        <m:e>
-                          <m:r>
-                            <a:rPr lang="en-US" sz="2000" b="0" i="1" smtClean="0">
-                              <a:latin typeface="Cambria Math"/>
-                            </a:rPr>
-                            <m:t>𝑇</m:t>
-                          </m:r>
-                        </m:e>
-                        <m:sub>
-                          <m:r>
-                            <a:rPr lang="en-US" sz="2000" b="0" i="1" smtClean="0">
-                              <a:latin typeface="Cambria Math"/>
-                            </a:rPr>
-                            <m:t>𝐶𝑜𝑛𝑣𝑒𝑟𝑠𝑖𝑜𝑛</m:t>
-                          </m:r>
-                        </m:sub>
-                      </m:sSub>
-                    </m:oMath>
-                  </m:oMathPara>
-                </a14:m>
-                <a:endParaRPr lang="en-US" sz="2000" dirty="0"/>
-              </a:p>
-            </p:txBody>
-          </p:sp>
-        </mc:Choice>
-        <mc:Fallback xmlns="">
-          <p:sp>
-            <p:nvSpPr>
-              <p:cNvPr id="6" name="TextBox 5"/>
-              <p:cNvSpPr txBox="1">
-                <a:spLocks noRot="1" noChangeAspect="1" noMove="1" noResize="1" noEditPoints="1" noAdjustHandles="1" noChangeArrowheads="1" noChangeShapeType="1" noTextEdit="1"/>
-              </p:cNvSpPr>
-              <p:nvPr/>
-            </p:nvSpPr>
-            <p:spPr>
-              <a:xfrm>
-                <a:off x="5578268" y="3560391"/>
-                <a:ext cx="3596562" cy="425053"/>
-              </a:xfrm>
-              <a:prstGeom prst="rect">
-                <a:avLst/>
-              </a:prstGeom>
-              <a:blipFill rotWithShape="1">
-                <a:blip r:embed="rId3"/>
-                <a:stretch>
-                  <a:fillRect b="-8571"/>
-                </a:stretch>
-              </a:blipFill>
-            </p:spPr>
-            <p:txBody>
-              <a:bodyPr/>
-              <a:lstStyle/>
-              <a:p>
-                <a:r>
-                  <a:rPr lang="en-US">
-                    <a:noFill/>
-                  </a:rPr>
-                  <a:t> </a:t>
-                </a:r>
-              </a:p>
-            </p:txBody>
-          </p:sp>
-        </mc:Fallback>
-      </mc:AlternateContent>
-      <mc:AlternateContent xmlns:mc="http://schemas.openxmlformats.org/markup-compatibility/2006" xmlns:a14="http://schemas.microsoft.com/office/drawing/2010/main">
-        <mc:Choice Requires="a14">
-          <p:sp>
-            <p:nvSpPr>
-              <p:cNvPr id="8" name="TextBox 7"/>
-              <p:cNvSpPr txBox="1"/>
-              <p:nvPr/>
-            </p:nvSpPr>
-            <p:spPr>
-              <a:xfrm>
-                <a:off x="5562600" y="4139544"/>
-                <a:ext cx="3317639" cy="410305"/>
-              </a:xfrm>
-              <a:prstGeom prst="rect">
-                <a:avLst/>
-              </a:prstGeom>
-              <a:noFill/>
-            </p:spPr>
-            <p:txBody>
-              <a:bodyPr wrap="none" rtlCol="0">
-                <a:spAutoFit/>
-              </a:bodyPr>
-              <a:lstStyle/>
-              <a:p>
-                <a:pPr/>
-                <a14:m>
-                  <m:oMathPara xmlns:m="http://schemas.openxmlformats.org/officeDocument/2006/math">
-                    <m:oMathParaPr>
-                      <m:jc m:val="centerGroup"/>
-                    </m:oMathParaPr>
-                    <m:oMath xmlns:m="http://schemas.openxmlformats.org/officeDocument/2006/math">
-                      <m:sSub>
-                        <m:sSubPr>
-                          <m:ctrlPr>
-                            <a:rPr lang="en-US" sz="2000" b="0" i="1" smtClean="0">
-                              <a:latin typeface="Cambria Math" panose="02040503050406030204" pitchFamily="18" charset="0"/>
-                            </a:rPr>
-                          </m:ctrlPr>
-                        </m:sSubPr>
-                        <m:e>
-                          <m:r>
-                            <a:rPr lang="en-US" sz="2000" b="0" i="1" smtClean="0">
-                              <a:latin typeface="Cambria Math"/>
-                            </a:rPr>
-                            <m:t>𝑇</m:t>
-                          </m:r>
-                        </m:e>
-                        <m:sub>
-                          <m:r>
-                            <a:rPr lang="en-US" sz="2000" b="0" i="1" smtClean="0">
-                              <a:latin typeface="Cambria Math"/>
-                            </a:rPr>
-                            <m:t>𝐶𝑜𝑛𝑣𝑒𝑟𝑠𝑖𝑜𝑛</m:t>
-                          </m:r>
-                        </m:sub>
-                      </m:sSub>
-                      <m:r>
-                        <a:rPr lang="en-US" sz="2000" dirty="0">
-                          <a:latin typeface="Cambria Math"/>
-                          <a:ea typeface="Cambria Math"/>
-                        </a:rPr>
-                        <m:t>=</m:t>
-                      </m:r>
-                      <m:r>
-                        <m:rPr>
-                          <m:sty m:val="p"/>
-                        </m:rPr>
-                        <a:rPr lang="en-US" sz="2000" b="0" i="0" dirty="0" smtClean="0">
-                          <a:latin typeface="Cambria Math"/>
-                          <a:ea typeface="Cambria Math"/>
-                        </a:rPr>
-                        <m:t>N</m:t>
-                      </m:r>
-                      <m:r>
-                        <a:rPr lang="en-US" sz="2000" b="0" i="1" dirty="0" smtClean="0">
-                          <a:latin typeface="Cambria Math"/>
-                          <a:ea typeface="Cambria Math"/>
-                        </a:rPr>
-                        <m:t>×</m:t>
-                      </m:r>
-                      <m:sSub>
-                        <m:sSubPr>
-                          <m:ctrlPr>
-                            <a:rPr lang="en-US" sz="2000" b="0" i="1" dirty="0" smtClean="0">
-                              <a:latin typeface="Cambria Math" panose="02040503050406030204" pitchFamily="18" charset="0"/>
-                              <a:ea typeface="Cambria Math"/>
-                            </a:rPr>
-                          </m:ctrlPr>
-                        </m:sSubPr>
-                        <m:e>
-                          <m:r>
-                            <a:rPr lang="en-US" sz="2000" b="0" i="1" dirty="0" smtClean="0">
-                              <a:latin typeface="Cambria Math"/>
-                              <a:ea typeface="Cambria Math"/>
-                            </a:rPr>
-                            <m:t>𝑇</m:t>
-                          </m:r>
-                        </m:e>
-                        <m:sub>
-                          <m:r>
-                            <a:rPr lang="en-US" sz="2000" b="0" i="1" dirty="0" smtClean="0">
-                              <a:latin typeface="Cambria Math"/>
-                              <a:ea typeface="Cambria Math"/>
-                            </a:rPr>
-                            <m:t>𝐴𝐷𝐶</m:t>
-                          </m:r>
-                          <m:r>
-                            <a:rPr lang="en-US" sz="2000" b="0" i="1" dirty="0" smtClean="0">
-                              <a:latin typeface="Cambria Math"/>
-                              <a:ea typeface="Cambria Math"/>
-                            </a:rPr>
-                            <m:t>_</m:t>
-                          </m:r>
-                          <m:r>
-                            <a:rPr lang="en-US" sz="2000" b="0" i="1" dirty="0" smtClean="0">
-                              <a:latin typeface="Cambria Math"/>
-                              <a:ea typeface="Cambria Math"/>
-                            </a:rPr>
-                            <m:t>𝐶𝑙𝑜𝑐𝑘</m:t>
-                          </m:r>
-                        </m:sub>
-                      </m:sSub>
-                    </m:oMath>
-                  </m:oMathPara>
-                </a14:m>
-                <a:endParaRPr lang="en-US" sz="2000" dirty="0"/>
-              </a:p>
-            </p:txBody>
-          </p:sp>
-        </mc:Choice>
-        <mc:Fallback xmlns="">
-          <p:sp>
-            <p:nvSpPr>
-              <p:cNvPr id="8" name="TextBox 7"/>
-              <p:cNvSpPr txBox="1">
-                <a:spLocks noRot="1" noChangeAspect="1" noMove="1" noResize="1" noEditPoints="1" noAdjustHandles="1" noChangeArrowheads="1" noChangeShapeType="1" noTextEdit="1"/>
-              </p:cNvSpPr>
-              <p:nvPr/>
-            </p:nvSpPr>
-            <p:spPr>
-              <a:xfrm>
-                <a:off x="5562600" y="4139544"/>
-                <a:ext cx="3317639" cy="410305"/>
-              </a:xfrm>
-              <a:prstGeom prst="rect">
-                <a:avLst/>
-              </a:prstGeom>
-              <a:blipFill rotWithShape="1">
-                <a:blip r:embed="rId4"/>
-                <a:stretch>
-                  <a:fillRect/>
-                </a:stretch>
-              </a:blipFill>
-            </p:spPr>
-            <p:txBody>
-              <a:bodyPr/>
-              <a:lstStyle/>
-              <a:p>
-                <a:r>
-                  <a:rPr lang="en-US">
-                    <a:noFill/>
-                  </a:rPr>
-                  <a:t> </a:t>
-                </a:r>
-              </a:p>
-            </p:txBody>
-          </p:sp>
-        </mc:Fallback>
-      </mc:AlternateContent>
-      <mc:AlternateContent xmlns:mc="http://schemas.openxmlformats.org/markup-compatibility/2006" xmlns:a14="http://schemas.microsoft.com/office/drawing/2010/main">
-        <mc:Choice Requires="a14">
-          <p:sp>
-            <p:nvSpPr>
-              <p:cNvPr id="7" name="Rectangle 6"/>
-              <p:cNvSpPr/>
-              <p:nvPr/>
-            </p:nvSpPr>
-            <p:spPr>
-              <a:xfrm>
-                <a:off x="5562600" y="4800600"/>
-                <a:ext cx="1162946" cy="391902"/>
-              </a:xfrm>
-              <a:prstGeom prst="rect">
-                <a:avLst/>
-              </a:prstGeom>
-            </p:spPr>
-            <p:txBody>
-              <a:bodyPr wrap="none">
-                <a:spAutoFit/>
-              </a:bodyPr>
-              <a:lstStyle/>
-              <a:p>
-                <a:pPr/>
-                <a14:m>
-                  <m:oMathPara xmlns:m="http://schemas.openxmlformats.org/officeDocument/2006/math">
-                    <m:oMathParaPr>
-                      <m:jc m:val="centerGroup"/>
-                    </m:oMathParaPr>
-                    <m:oMath xmlns:m="http://schemas.openxmlformats.org/officeDocument/2006/math">
-                      <m:sSub>
-                        <m:sSubPr>
-                          <m:ctrlPr>
-                            <a:rPr lang="en-US" i="1">
-                              <a:latin typeface="Cambria Math" panose="02040503050406030204" pitchFamily="18" charset="0"/>
-                            </a:rPr>
-                          </m:ctrlPr>
-                        </m:sSubPr>
-                        <m:e>
-                          <m:r>
-                            <a:rPr lang="en-US" i="1">
-                              <a:latin typeface="Cambria Math"/>
-                            </a:rPr>
-                            <m:t>𝑇</m:t>
-                          </m:r>
-                        </m:e>
-                        <m:sub>
-                          <m:r>
-                            <a:rPr lang="en-US" i="1">
-                              <a:latin typeface="Cambria Math"/>
-                            </a:rPr>
-                            <m:t>𝑠𝑎𝑚𝑝𝑙𝑖𝑛𝑔</m:t>
-                          </m:r>
-                        </m:sub>
-                      </m:sSub>
-                    </m:oMath>
-                  </m:oMathPara>
-                </a14:m>
-                <a:endParaRPr lang="en-US" dirty="0"/>
-              </a:p>
-            </p:txBody>
-          </p:sp>
-        </mc:Choice>
-        <mc:Fallback xmlns="">
-          <p:sp>
-            <p:nvSpPr>
-              <p:cNvPr id="7" name="Rectangle 6"/>
-              <p:cNvSpPr>
-                <a:spLocks noRot="1" noChangeAspect="1" noMove="1" noResize="1" noEditPoints="1" noAdjustHandles="1" noChangeArrowheads="1" noChangeShapeType="1" noTextEdit="1"/>
-              </p:cNvSpPr>
-              <p:nvPr/>
-            </p:nvSpPr>
-            <p:spPr>
-              <a:xfrm>
-                <a:off x="5562600" y="4800600"/>
-                <a:ext cx="1162946" cy="391902"/>
-              </a:xfrm>
-              <a:prstGeom prst="rect">
-                <a:avLst/>
-              </a:prstGeom>
-              <a:blipFill rotWithShape="1">
-                <a:blip r:embed="rId5"/>
-                <a:stretch>
-                  <a:fillRect b="-9375"/>
-                </a:stretch>
-              </a:blipFill>
-            </p:spPr>
-            <p:txBody>
-              <a:bodyPr/>
-              <a:lstStyle/>
-              <a:p>
-                <a:r>
-                  <a:rPr lang="en-US">
-                    <a:noFill/>
-                  </a:rPr>
-                  <a:t> </a:t>
-                </a:r>
-              </a:p>
-            </p:txBody>
-          </p:sp>
-        </mc:Fallback>
-      </mc:AlternateContent>
-      <p:sp>
-        <p:nvSpPr>
-          <p:cNvPr id="9" name="TextBox 8"/>
-          <p:cNvSpPr txBox="1"/>
-          <p:nvPr/>
-        </p:nvSpPr>
-        <p:spPr>
-          <a:xfrm>
-            <a:off x="6598920" y="4823170"/>
-            <a:ext cx="2395399" cy="369332"/>
-          </a:xfrm>
-          <a:prstGeom prst="rect">
-            <a:avLst/>
-          </a:prstGeom>
-          <a:noFill/>
-        </p:spPr>
-        <p:txBody>
-          <a:bodyPr wrap="none" rtlCol="0">
-            <a:spAutoFit/>
-          </a:bodyPr>
-          <a:lstStyle/>
-          <a:p>
-            <a:r>
-              <a:rPr lang="en-US" dirty="0"/>
-              <a:t>is software configurable</a:t>
-            </a:r>
-          </a:p>
-        </p:txBody>
-      </p:sp>
-    </p:spTree>
-    <p:extLst>
-      <p:ext uri="{BB962C8B-B14F-4D97-AF65-F5344CB8AC3E}">
-        <p14:creationId xmlns:p14="http://schemas.microsoft.com/office/powerpoint/2010/main" val="1849241118"/>
       </p:ext>
     </p:extLst>
   </p:cSld>
@@ -19372,7 +15930,7 @@
           <p:nvPr>
             <p:extLst>
               <p:ext uri="{D42A27DB-BD31-4B8C-83A1-F6EECF244321}">
-                <p14:modId xmlns:p14="http://schemas.microsoft.com/office/powerpoint/2010/main" val="644379353"/>
+                <p14:modId xmlns:p14="http://schemas.microsoft.com/office/powerpoint/2010/main" val="4124519048"/>
               </p:ext>
             </p:extLst>
           </p:nvPr>
@@ -22323,6 +18881,60 @@
               <a:ea typeface="Cambria"/>
               <a:cs typeface="Times New Roman"/>
             </a:endParaRPr>
+          </a:p>
+        </p:txBody>
+      </p:sp>
+      <p:sp>
+        <p:nvSpPr>
+          <p:cNvPr id="7" name="TextBox 6">
+            <a:extLst>
+              <a:ext uri="{FF2B5EF4-FFF2-40B4-BE49-F238E27FC236}">
+                <a16:creationId xmlns:a16="http://schemas.microsoft.com/office/drawing/2014/main" id="{91A4DE93-40B1-3CA9-1D41-3281E80C40F8}"/>
+              </a:ext>
+            </a:extLst>
+          </p:cNvPr>
+          <p:cNvSpPr txBox="1"/>
+          <p:nvPr/>
+        </p:nvSpPr>
+        <p:spPr>
+          <a:xfrm>
+            <a:off x="304800" y="3463413"/>
+            <a:ext cx="3425952" cy="369332"/>
+          </a:xfrm>
+          <a:prstGeom prst="rect">
+            <a:avLst/>
+          </a:prstGeom>
+          <a:solidFill>
+            <a:schemeClr val="bg1">
+              <a:lumMod val="85000"/>
+            </a:schemeClr>
+          </a:solidFill>
+        </p:spPr>
+        <p:style>
+          <a:lnRef idx="1">
+            <a:schemeClr val="dk1"/>
+          </a:lnRef>
+          <a:fillRef idx="2">
+            <a:schemeClr val="dk1"/>
+          </a:fillRef>
+          <a:effectRef idx="1">
+            <a:schemeClr val="dk1"/>
+          </a:effectRef>
+          <a:fontRef idx="minor">
+            <a:schemeClr val="dk1"/>
+          </a:fontRef>
+        </p:style>
+        <p:txBody>
+          <a:bodyPr wrap="square">
+            <a:spAutoFit/>
+          </a:bodyPr>
+          <a:lstStyle/>
+          <a:p>
+            <a:pPr lvl="1"/>
+            <a:r>
+              <a:rPr lang="en-US" dirty="0"/>
+              <a:t>Big Endian or Little Endian?</a:t>
+            </a:r>
           </a:p>
         </p:txBody>
       </p:sp>
